--- a/courses/COLL150-Fall26/Slides/Unit 1 - Pygmalion & Narcissus.pptx
+++ b/courses/COLL150-Fall26/Slides/Unit 1 - Pygmalion & Narcissus.pptx
@@ -5,36 +5,35 @@
     <p:sldMasterId id="2147483648" r:id="rId1"/>
   </p:sldMasterIdLst>
   <p:notesMasterIdLst>
-    <p:notesMasterId r:id="rId29"/>
+    <p:notesMasterId r:id="rId28"/>
   </p:notesMasterIdLst>
   <p:sldIdLst>
     <p:sldId id="256" r:id="rId2"/>
     <p:sldId id="258" r:id="rId3"/>
     <p:sldId id="259" r:id="rId4"/>
-    <p:sldId id="260" r:id="rId5"/>
-    <p:sldId id="261" r:id="rId6"/>
-    <p:sldId id="262" r:id="rId7"/>
-    <p:sldId id="263" r:id="rId8"/>
-    <p:sldId id="264" r:id="rId9"/>
-    <p:sldId id="265" r:id="rId10"/>
-    <p:sldId id="266" r:id="rId11"/>
-    <p:sldId id="267" r:id="rId12"/>
-    <p:sldId id="268" r:id="rId13"/>
-    <p:sldId id="269" r:id="rId14"/>
-    <p:sldId id="270" r:id="rId15"/>
-    <p:sldId id="271" r:id="rId16"/>
-    <p:sldId id="272" r:id="rId17"/>
-    <p:sldId id="273" r:id="rId18"/>
-    <p:sldId id="274" r:id="rId19"/>
-    <p:sldId id="275" r:id="rId20"/>
-    <p:sldId id="276" r:id="rId21"/>
-    <p:sldId id="277" r:id="rId22"/>
-    <p:sldId id="278" r:id="rId23"/>
-    <p:sldId id="279" r:id="rId24"/>
-    <p:sldId id="280" r:id="rId25"/>
-    <p:sldId id="281" r:id="rId26"/>
-    <p:sldId id="282" r:id="rId27"/>
-    <p:sldId id="283" r:id="rId28"/>
+    <p:sldId id="261" r:id="rId5"/>
+    <p:sldId id="262" r:id="rId6"/>
+    <p:sldId id="263" r:id="rId7"/>
+    <p:sldId id="264" r:id="rId8"/>
+    <p:sldId id="265" r:id="rId9"/>
+    <p:sldId id="266" r:id="rId10"/>
+    <p:sldId id="267" r:id="rId11"/>
+    <p:sldId id="268" r:id="rId12"/>
+    <p:sldId id="269" r:id="rId13"/>
+    <p:sldId id="270" r:id="rId14"/>
+    <p:sldId id="271" r:id="rId15"/>
+    <p:sldId id="272" r:id="rId16"/>
+    <p:sldId id="273" r:id="rId17"/>
+    <p:sldId id="274" r:id="rId18"/>
+    <p:sldId id="275" r:id="rId19"/>
+    <p:sldId id="276" r:id="rId20"/>
+    <p:sldId id="277" r:id="rId21"/>
+    <p:sldId id="278" r:id="rId22"/>
+    <p:sldId id="279" r:id="rId23"/>
+    <p:sldId id="280" r:id="rId24"/>
+    <p:sldId id="281" r:id="rId25"/>
+    <p:sldId id="282" r:id="rId26"/>
+    <p:sldId id="283" r:id="rId27"/>
   </p:sldIdLst>
   <p:sldSz cx="12192000" cy="6858000"/>
   <p:notesSz cx="6858000" cy="12192000"/>
@@ -142,8 +141,8 @@
 <pc:chgInfo xmlns:a="http://schemas.openxmlformats.org/drawingml/2006/main" xmlns:r="http://schemas.openxmlformats.org/officeDocument/2006/relationships" xmlns:ac="http://schemas.microsoft.com/office/drawing/2013/main/command" xmlns:pc="http://schemas.microsoft.com/office/powerpoint/2013/main/command">
   <pc:docChgLst>
     <pc:chgData name="Ashley Y. Gao" userId="f07f2add99568f29" providerId="LiveId" clId="{D3788EF0-A3FF-42A8-A4D2-3038F3EB0EE4}"/>
-    <pc:docChg chg="delSld">
-      <pc:chgData name="Ashley Y. Gao" userId="f07f2add99568f29" providerId="LiveId" clId="{D3788EF0-A3FF-42A8-A4D2-3038F3EB0EE4}" dt="2026-09-01T13:12:52.598" v="0" actId="47"/>
+    <pc:docChg chg="undo custSel delSld modSld">
+      <pc:chgData name="Ashley Y. Gao" userId="f07f2add99568f29" providerId="LiveId" clId="{D3788EF0-A3FF-42A8-A4D2-3038F3EB0EE4}" dt="2026-09-01T13:47:38.123" v="3" actId="47"/>
       <pc:docMkLst>
         <pc:docMk/>
       </pc:docMkLst>
@@ -153,6 +152,21 @@
           <pc:docMk/>
           <pc:sldMk cId="0" sldId="257"/>
         </pc:sldMkLst>
+      </pc:sldChg>
+      <pc:sldChg chg="addSp delSp del mod">
+        <pc:chgData name="Ashley Y. Gao" userId="f07f2add99568f29" providerId="LiveId" clId="{D3788EF0-A3FF-42A8-A4D2-3038F3EB0EE4}" dt="2026-09-01T13:47:38.123" v="3" actId="47"/>
+        <pc:sldMkLst>
+          <pc:docMk/>
+          <pc:sldMk cId="0" sldId="260"/>
+        </pc:sldMkLst>
+        <pc:spChg chg="add del">
+          <ac:chgData name="Ashley Y. Gao" userId="f07f2add99568f29" providerId="LiveId" clId="{D3788EF0-A3FF-42A8-A4D2-3038F3EB0EE4}" dt="2026-09-01T13:47:35.859" v="2" actId="478"/>
+          <ac:spMkLst>
+            <pc:docMk/>
+            <pc:sldMk cId="0" sldId="260"/>
+            <ac:spMk id="5" creationId="{00000000-0000-0000-0000-000000000000}"/>
+          </ac:spMkLst>
+        </pc:spChg>
       </pc:sldChg>
     </pc:docChg>
   </pc:docChgLst>
@@ -417,7 +431,7 @@
           <a:p>
             <a:r>
               <a:rPr lang="en-US" dirty="0"/>
-              <a:t>The division of labour here is the most transferable idea in the Pygmalion half. Makers claim the artefact and disclaim the agency. Keep the question open rather than resolving it — there are honest versions of "we do not fully understand why it works" as well as evasive ones, and students should be able to tell them apart by the end of the term.</a:t>
+              <a:t>Handle this without lecturing them into a single verdict. The strongest student objection — worth soliciting — is that Ovid gives almost nobody a rich interiority in a story this compressed, so her silence may be economy rather than statement. The counter is that Ovid gives Myrrha, only a hundred lines later, an enormous interior monologue. He can do it when he wants to.</a:t>
             </a:r>
           </a:p>
         </p:txBody>
@@ -504,7 +518,7 @@
           <a:p>
             <a:r>
               <a:rPr lang="en-US" dirty="0"/>
-              <a:t>Handle this without lecturing them into a single verdict. The strongest student objection — worth soliciting — is that Ovid gives almost nobody a rich interiority in a story this compressed, so her silence may be economy rather than statement. The counter is that Ovid gives Myrrha, only a hundred lines later, an enormous interior monologue. He can do it when he wants to.</a:t>
+              <a:t>Tell students these four will be reused all term as a checklist against later texts and against real systems. The closing line is important — it keeps the course out of the consciousness debate, which undergraduates will otherwise spend the whole semester in.</a:t>
             </a:r>
           </a:p>
         </p:txBody>
@@ -591,7 +605,7 @@
           <a:p>
             <a:r>
               <a:rPr lang="en-US" dirty="0"/>
-              <a:t>Tell students these four will be reused all term as a checklist against later texts and against real systems. The closing line is important — it keeps the course out of the consciousness debate, which undergraduates will otherwise spend the whole semester in.</a:t>
+              <a:t>Swap freely for whatever is on your syllabus — this grid is a scaffold, not a canon. If you teach anime or games, Chobits, Blade Runner: Black Lotus, Detroit: Become Human and Nier: Automata all slot in cleanly. Keep the test line at the bottom whatever you substitute.</a:t>
             </a:r>
           </a:p>
         </p:txBody>
@@ -678,7 +692,7 @@
           <a:p>
             <a:r>
               <a:rPr lang="en-US" dirty="0"/>
-              <a:t>Swap freely for whatever is on your syllabus — this grid is a scaffold, not a canon. If you teach anime or games, Chobits, Blade Runner: Black Lotus, Detroit: Become Human and Nier: Automata all slot in cleanly. Keep the test line at the bottom whatever you substitute.</a:t>
+              <a:t>Question three is the productive one and usually generates the best writing later. If discussion is slow, seed it: the most common answers are an accusation, a question about what she is, and a request to be left alone — all three are readings of the silence in Ovid.</a:t>
             </a:r>
           </a:p>
         </p:txBody>
@@ -765,7 +779,7 @@
           <a:p>
             <a:r>
               <a:rPr lang="en-US" dirty="0"/>
-              <a:t>Question three is the productive one and usually generates the best writing later. If discussion is slow, seed it: the most common answers are an accusation, a question about what she is, and a request to be left alone — all three are readings of the silence in Ovid.</a:t>
+              <a:t>Twenty-four minutes. Note for the room that Ovid tells these as one story, not two — the modern habit of extracting Narcissus alone loses the argument the poem is making, which is about the relationship between a compelled speaker and a compelled looker.</a:t>
             </a:r>
           </a:p>
         </p:txBody>
@@ -852,7 +866,7 @@
           <a:p>
             <a:r>
               <a:rPr lang="en-US" dirty="0"/>
-              <a:t>Twenty-four minutes. Note for the room that Ovid tells these as one story, not two — the modern habit of extracting Narcissus alone loses the argument the poem is making, which is about the relationship between a compelled speaker and a compelled looker.</a:t>
+              <a:t>Do not resolve the closing question here; it is the seed for the sycophancy discussion in ten minutes. If someone raises interpretability or self-report in language models, let it run for a minute but bring it back to the text — the poem is about a person, and the analogy has to be earned.</a:t>
             </a:r>
           </a:p>
         </p:txBody>
@@ -939,7 +953,7 @@
           <a:p>
             <a:r>
               <a:rPr lang="en-US" dirty="0"/>
-              <a:t>Do not resolve the closing question here; it is the seed for the sycophancy discussion in ten minutes. If someone raises interpretability or self-report in language models, let it run for a minute but bring it back to the text — the poem is about a person, and the analogy has to be earned.</a:t>
+              <a:t>The detail students miss is that she also cannot stay silent — she has to answer. Compulsory response plus zero origination is a much stranger condition than muteness, and it is the part that maps most uncomfortably onto systems that must return something for every input.</a:t>
             </a:r>
           </a:p>
         </p:txBody>
@@ -1026,7 +1040,7 @@
           <a:p>
             <a:r>
               <a:rPr lang="en-US" dirty="0"/>
-              <a:t>The detail students miss is that she also cannot stay silent — she has to answer. Compulsory response plus zero origination is a much stranger condition than muteness, and it is the part that maps most uncomfortably onto systems that must return something for every input.</a:t>
+              <a:t>Read this exchange out loud with two students; the effect on the room is worth the ninety seconds. Then make the argument explicit: every word Echo utters is his, and yet the sequence is unmistakably a courtship conducted by her. Whatever she is doing, "merely repeating" does not describe it.</a:t>
             </a:r>
           </a:p>
         </p:txBody>
@@ -1113,7 +1127,7 @@
           <a:p>
             <a:r>
               <a:rPr lang="en-US" dirty="0"/>
-              <a:t>Read this exchange out loud with two students; the effect on the room is worth the ninety seconds. Then make the argument explicit: every word Echo utters is his, and yet the sequence is unmistakably a courtship conducted by her. Whatever she is doing, "merely repeating" does not describe it.</a:t>
+              <a:t>If Bender, Gebru, McMillan-Major and Mitchell (2021) is on your syllabus, this is the slide to name it — and to be fair to it, since the paper’s argument is about training data, scale and harm, not a claim that repetition can never mean. Ovid is useful here precisely because he refuses the easy version of both positions.</a:t>
             </a:r>
           </a:p>
         </p:txBody>
@@ -1200,7 +1214,7 @@
           <a:p>
             <a:r>
               <a:rPr lang="en-US" dirty="0"/>
-              <a:t>If Bender, Gebru, McMillan-Major and Mitchell (2021) is on your syllabus, this is the slide to name it — and to be fair to it, since the paper’s argument is about training data, scale and harm, not a claim that repetition can never mean. Ovid is useful here precisely because he refuses the easy version of both positions.</a:t>
+              <a:t>The description of the untouched pool is the detail to slow down on. Ovid could have written a puddle. He writes a surface engineered for perfect fidelity, protected from every source of noise. That is a description of an interface, and it is why the story is about a technology rather than a personality defect.</a:t>
             </a:r>
           </a:p>
         </p:txBody>
@@ -1374,7 +1388,7 @@
           <a:p>
             <a:r>
               <a:rPr lang="en-US" dirty="0"/>
-              <a:t>The description of the untouched pool is the detail to slow down on. Ovid could have written a puddle. He writes a surface engineered for perfect fidelity, protected from every source of noise. That is a description of an interface, and it is why the story is about a technology rather than a personality defect.</a:t>
+              <a:t>This slide usually produces the best exchange of the hour. Students want disclosure to be sufficient because it is the intervention they can imagine. Ovid has already run the experiment and reports failure. Push them toward the harder question of what design change, rather than what warning label, would actually alter the outcome.</a:t>
             </a:r>
           </a:p>
         </p:txBody>
@@ -1461,7 +1475,7 @@
           <a:p>
             <a:r>
               <a:rPr lang="en-US" dirty="0"/>
-              <a:t>This slide usually produces the best exchange of the hour. Students want disclosure to be sufficient because it is the intervention they can imagine. Ovid has already run the experiment and reports failure. Push them toward the harder question of what design change, rather than what warning label, would actually alter the outcome.</a:t>
+              <a:t>If you have time for one flourish, this is it: a synthetic voice and a generated image are the two halves of the artificial person our media are currently assembling, and Ovid has already told us that each half alone is a corpse. Say it once and move on — it lands harder without elaboration.</a:t>
             </a:r>
           </a:p>
         </p:txBody>
@@ -1548,7 +1562,7 @@
           <a:p>
             <a:r>
               <a:rPr lang="en-US" dirty="0"/>
-              <a:t>If you have time for one flourish, this is it: a synthetic voice and a generated image are the two halves of the artificial person our media are currently assembling, and Ovid has already told us that each half alone is a corpse. Say it once and move on — it lands harder without elaboration.</a:t>
+              <a:t>Weizenbaum is worth thirty seconds even if he is not assigned — his own secretary asking him to leave the room is the anecdote students remember, and it makes the point that the effect does not depend on being fooled about what the system is.</a:t>
             </a:r>
           </a:p>
         </p:txBody>
@@ -1635,7 +1649,7 @@
           <a:p>
             <a:r>
               <a:rPr lang="en-US" dirty="0"/>
-              <a:t>Weizenbaum is worth thirty seconds even if he is not assigned — his own secretary asking him to leave the room is the anecdote students remember, and it makes the point that the effect does not depend on being fooled about what the system is.</a:t>
+              <a:t>Expect a challenge to the claim that only two stances are available to the system — a student will argue that a model trained on human output is in Echo’s position and one trained on its own output is in Narcissus’s. That is a good argument and you should let them make it. What no system occupies is Pygmalion, and that asymmetry is worth naming.</a:t>
             </a:r>
           </a:p>
         </p:txBody>
@@ -1722,7 +1736,7 @@
           <a:p>
             <a:r>
               <a:rPr lang="en-US" dirty="0"/>
-              <a:t>Expect a challenge to the claim that only two stances are available to the system — a student will argue that a model trained on human output is in Echo’s position and one trained on its own output is in Narcissus’s. That is a good argument and you should let them make it. What no system occupies is Pygmalion, and that asymmetry is worth naming.</a:t>
+              <a:t>Nine minutes of work, four minutes of reporting. Enforce the three-part report format strictly — the line reference is what stops the reports drifting into opinion, and the contemporary example is what stops them drifting into paraphrase.</a:t>
             </a:r>
           </a:p>
         </p:txBody>
@@ -1809,7 +1823,7 @@
           <a:p>
             <a:r>
               <a:rPr lang="en-US" dirty="0"/>
-              <a:t>Nine minutes of work, four minutes of reporting. Enforce the three-part report format strictly — the line reference is what stops the reports drifting into opinion, and the contemporary example is what stops them drifting into paraphrase.</a:t>
+              <a:t>Keep this to three minutes so the exit ticket gets its full five. If the group reports have already made one of these points, drop it and say so — crediting the students who got there first is worth more than the completeness of the slide.</a:t>
             </a:r>
           </a:p>
         </p:txBody>
@@ -1896,7 +1910,7 @@
           <a:p>
             <a:r>
               <a:rPr lang="en-US" dirty="0"/>
-              <a:t>Keep this to three minutes so the exit ticket gets its full five. If the group reports have already made one of these points, drop it and say so — crediting the students who got there first is worth more than the completeness of the slide.</a:t>
+              <a:t>Collect the tickets on the way out. They are the fastest diagnostic you will get of who can hold two frames at once, and the paragraphs that identify a genuine mismatch between Ovid and the present are usually the students to call on first next week.</a:t>
             </a:r>
           </a:p>
         </p:txBody>
@@ -1919,93 +1933,6 @@
             <a:fld id="{F7021451-1387-4CA6-816F-3879F97B5CBC}" type="slidenum">
               <a:rPr lang="en-US"/>
               <a:t>26</a:t>
-            </a:fld>
-            <a:endParaRPr lang="en-US"/>
-          </a:p>
-        </p:txBody>
-      </p:sp>
-    </p:spTree>
-    <p:extLst>
-      <p:ext uri="{BB962C8B-B14F-4D97-AF65-F5344CB8AC3E}">
-        <p14:creationId xmlns:p14="http://schemas.microsoft.com/office/powerpoint/2010/main" val="1024086991"/>
-      </p:ext>
-    </p:extLst>
-  </p:cSld>
-  <p:clrMapOvr>
-    <a:masterClrMapping/>
-  </p:clrMapOvr>
-</p:notes>
-</file>
-
-<file path=ppt/notesSlides/notesSlide27.xml><?xml version="1.0" encoding="utf-8"?>
-<p:notes xmlns:a="http://schemas.openxmlformats.org/drawingml/2006/main" xmlns:r="http://schemas.openxmlformats.org/officeDocument/2006/relationships" xmlns:p="http://schemas.openxmlformats.org/presentationml/2006/main">
-  <p:cSld>
-    <p:spTree>
-      <p:nvGrpSpPr>
-        <p:cNvPr id="1" name=""/>
-        <p:cNvGrpSpPr/>
-        <p:nvPr/>
-      </p:nvGrpSpPr>
-      <p:grpSpPr>
-        <a:xfrm>
-          <a:off x="0" y="0"/>
-          <a:ext cx="0" cy="0"/>
-          <a:chOff x="0" y="0"/>
-          <a:chExt cx="0" cy="0"/>
-        </a:xfrm>
-      </p:grpSpPr>
-      <p:sp>
-        <p:nvSpPr>
-          <p:cNvPr id="2" name="Slide Image Placeholder 1"/>
-          <p:cNvSpPr>
-            <a:spLocks noGrp="1" noRot="1" noChangeAspect="1"/>
-          </p:cNvSpPr>
-          <p:nvPr>
-            <p:ph type="sldImg"/>
-          </p:nvPr>
-        </p:nvSpPr>
-        <p:spPr/>
-      </p:sp>
-      <p:sp>
-        <p:nvSpPr>
-          <p:cNvPr id="3" name="Notes Placeholder 2"/>
-          <p:cNvSpPr>
-            <a:spLocks noGrp="1"/>
-          </p:cNvSpPr>
-          <p:nvPr>
-            <p:ph type="body" idx="1"/>
-          </p:nvPr>
-        </p:nvSpPr>
-        <p:spPr/>
-        <p:txBody>
-          <a:bodyPr/>
-          <a:lstStyle/>
-          <a:p>
-            <a:r>
-              <a:rPr lang="en-US" dirty="0"/>
-              <a:t>Collect the tickets on the way out. They are the fastest diagnostic you will get of who can hold two frames at once, and the paragraphs that identify a genuine mismatch between Ovid and the present are usually the students to call on first next week.</a:t>
-            </a:r>
-          </a:p>
-        </p:txBody>
-      </p:sp>
-      <p:sp>
-        <p:nvSpPr>
-          <p:cNvPr id="4" name="Slide Number Placeholder 3"/>
-          <p:cNvSpPr>
-            <a:spLocks noGrp="1"/>
-          </p:cNvSpPr>
-          <p:nvPr>
-            <p:ph type="sldNum" sz="quarter" idx="10"/>
-          </p:nvPr>
-        </p:nvSpPr>
-        <p:spPr/>
-        <p:txBody>
-          <a:bodyPr/>
-          <a:lstStyle/>
-          <a:p>
-            <a:fld id="{F7021451-1387-4CA6-816F-3879F97B5CBC}" type="slidenum">
-              <a:rPr lang="en-US"/>
-              <a:t>27</a:t>
             </a:fld>
             <a:endParaRPr lang="en-US"/>
           </a:p>
@@ -2157,7 +2084,7 @@
           <a:p>
             <a:r>
               <a:rPr lang="en-US" dirty="0"/>
-              <a:t>Silence matters here — if they talk, they converge, and the exit ticket loses its bite. Do not collect these. Two or three volunteers can read at the end if the room is warm; otherwise it stays private.</a:t>
+              <a:t>Twenty-six minutes from here: roughly six on the prologue, eight on the making and the close reading, six on the prayer and the animation, six on discussion.</a:t>
             </a:r>
           </a:p>
         </p:txBody>
@@ -2244,7 +2171,7 @@
           <a:p>
             <a:r>
               <a:rPr lang="en-US" dirty="0"/>
-              <a:t>Twenty-six minutes from here: roughly six on the prologue, eight on the making and the close reading, six on the prayer and the animation, six on discussion.</a:t>
+              <a:t>Most students arrive with the Shaw/My Fair Lady version of Pygmalion — a benign story about a craftsman rewarded for devotion. The prologue is the fastest way to dislodge that. The synthetic woman is introduced as a replacement for women found defective. That framing is inherited almost intact by Villiers, by parts of Blade Runner, and by the marketing copy of present-day companion apps.</a:t>
             </a:r>
           </a:p>
         </p:txBody>
@@ -2331,7 +2258,7 @@
           <a:p>
             <a:r>
               <a:rPr lang="en-US" dirty="0"/>
-              <a:t>Most students arrive with the Shaw/My Fair Lady version of Pygmalion — a benign story about a craftsman rewarded for devotion. The prologue is the fastest way to dislodge that. The synthetic woman is introduced as a replacement for women found defective. That framing is inherited almost intact by Villiers, by parts of Blade Runner, and by the marketing copy of present-day companion apps.</a:t>
+              <a:t>Push on step two. The line about modesty holding her back is the hinge of the whole story: he supplies her interiority and then treats it as evidence. This is the exact structure of anthropomorphism — we generate the intention and then read it off the artefact as though we had found it there. It comes back on the Echo slides.</a:t>
             </a:r>
           </a:p>
         </p:txBody>
@@ -2418,7 +2345,7 @@
           <a:p>
             <a:r>
               <a:rPr lang="en-US" dirty="0"/>
-              <a:t>Push on step two. The line about modesty holding her back is the hinge of the whole story: he supplies her interiority and then treats it as evidence. This is the exact structure of anthropomorphism — we generate the intention and then read it off the artefact as though we had found it there. It comes back on the Echo slides.</a:t>
+              <a:t>This is the one phrase worth putting on the board. It gives students a criterion they can apply to any object in the course: does this thing advertise or conceal its own manufacture, and what follows from that choice? It also lets you introduce the tension between the aesthetics of seamlessness and the ethics of disclosure without needing any policy vocabulary.</a:t>
             </a:r>
           </a:p>
         </p:txBody>
@@ -2505,7 +2432,7 @@
           <a:p>
             <a:r>
               <a:rPr lang="en-US" dirty="0"/>
-              <a:t>This is the one phrase worth putting on the board. It gives students a criterion they can apply to any object in the course: does this thing advertise or conceal its own manufacture, and what follows from that choice? It also lets you introduce the tension between the aesthetics of seamlessness and the ethics of disclosure without needing any policy vocabulary.</a:t>
+              <a:t>If your students have done any prompting, this slide sells itself — the gap between the literal request and the intended one is the thing they fight with daily. The sharper point is the ethical one: the euphemism lets Pygmalion receive exactly what he wanted while never having said it, and Venus’s inference is what makes that possible. Systems that are good at inferring intent also absorb responsibility for intents nobody was willing to state.</a:t>
             </a:r>
           </a:p>
         </p:txBody>
@@ -2592,7 +2519,7 @@
           <a:p>
             <a:r>
               <a:rPr lang="en-US" dirty="0"/>
-              <a:t>If your students have done any prompting, this slide sells itself — the gap between the literal request and the intended one is the thing they fight with daily. The sharper point is the ethical one: the euphemism lets Pygmalion receive exactly what he wanted while never having said it, and Venus’s inference is what makes that possible. Systems that are good at inferring intent also absorb responsibility for intents nobody was willing to state.</a:t>
+              <a:t>The division of labour here is the most transferable idea in the Pygmalion half. Makers claim the artefact and disclaim the agency. Keep the question open rather than resolving it — there are honest versions of "we do not fully understand why it works" as well as evasive ones, and students should be able to tell them apart by the end of the term.</a:t>
             </a:r>
           </a:p>
         </p:txBody>
@@ -3293,816 +3220,6 @@
 
 <file path=ppt/slides/slide10.xml><?xml version="1.0" encoding="utf-8"?>
 <p:sld xmlns:a="http://schemas.openxmlformats.org/drawingml/2006/main" xmlns:r="http://schemas.openxmlformats.org/officeDocument/2006/relationships" xmlns:p="http://schemas.openxmlformats.org/presentationml/2006/main">
-  <p:cSld name="Slide 11">
-    <p:bg>
-      <p:bgPr>
-        <a:solidFill>
-          <a:srgbClr val="FFFFFF"/>
-        </a:solidFill>
-        <a:effectLst/>
-      </p:bgPr>
-    </p:bg>
-    <p:spTree>
-      <p:nvGrpSpPr>
-        <p:cNvPr id="1" name=""/>
-        <p:cNvGrpSpPr/>
-        <p:nvPr/>
-      </p:nvGrpSpPr>
-      <p:grpSpPr>
-        <a:xfrm>
-          <a:off x="0" y="0"/>
-          <a:ext cx="0" cy="0"/>
-          <a:chOff x="0" y="0"/>
-          <a:chExt cx="0" cy="0"/>
-        </a:xfrm>
-      </p:grpSpPr>
-      <p:sp>
-        <p:nvSpPr>
-          <p:cNvPr id="2" name="Shape 0"/>
-          <p:cNvSpPr/>
-          <p:nvPr/>
-        </p:nvSpPr>
-        <p:spPr>
-          <a:xfrm>
-            <a:off x="640080" y="429768"/>
-            <a:ext cx="137160" cy="137160"/>
-          </a:xfrm>
-          <a:prstGeom prst="ellipse">
-            <a:avLst/>
-          </a:prstGeom>
-          <a:solidFill>
-            <a:srgbClr val="C9A227"/>
-          </a:solidFill>
-          <a:ln/>
-        </p:spPr>
-        <p:txBody>
-          <a:bodyPr/>
-          <a:lstStyle/>
-          <a:p>
-            <a:endParaRPr lang="en-US"/>
-          </a:p>
-        </p:txBody>
-      </p:sp>
-      <p:sp>
-        <p:nvSpPr>
-          <p:cNvPr id="3" name="Text 1"/>
-          <p:cNvSpPr txBox="1"/>
-          <p:nvPr/>
-        </p:nvSpPr>
-        <p:spPr>
-          <a:xfrm>
-            <a:off x="886968" y="365760"/>
-            <a:ext cx="10058400" cy="274320"/>
-          </a:xfrm>
-          <a:prstGeom prst="rect">
-            <a:avLst/>
-          </a:prstGeom>
-          <a:noFill/>
-          <a:ln/>
-        </p:spPr>
-        <p:txBody>
-          <a:bodyPr wrap="square" lIns="0" tIns="0" rIns="0" bIns="0" rtlCol="0" anchor="ctr"/>
-          <a:lstStyle/>
-          <a:p>
-            <a:pPr marL="0" indent="0">
-              <a:buNone/>
-            </a:pPr>
-            <a:r>
-              <a:rPr lang="en-US" sz="1100" b="1" kern="0" spc="160" dirty="0">
-                <a:solidFill>
-                  <a:srgbClr val="5F6478"/>
-                </a:solidFill>
-                <a:latin typeface="Calibri" pitchFamily="34" charset="0"/>
-                <a:ea typeface="Calibri" pitchFamily="34" charset="-122"/>
-                <a:cs typeface="Calibri" pitchFamily="34" charset="-120"/>
-              </a:rPr>
-              <a:t>BK X:280–294</a:t>
-            </a:r>
-            <a:endParaRPr lang="en-US" sz="1100" dirty="0"/>
-          </a:p>
-        </p:txBody>
-      </p:sp>
-      <p:sp>
-        <p:nvSpPr>
-          <p:cNvPr id="4" name="Text 2"/>
-          <p:cNvSpPr txBox="1"/>
-          <p:nvPr/>
-        </p:nvSpPr>
-        <p:spPr>
-          <a:xfrm>
-            <a:off x="640080" y="713232"/>
-            <a:ext cx="10911535" cy="658368"/>
-          </a:xfrm>
-          <a:prstGeom prst="rect">
-            <a:avLst/>
-          </a:prstGeom>
-          <a:noFill/>
-          <a:ln/>
-        </p:spPr>
-        <p:txBody>
-          <a:bodyPr wrap="square" lIns="0" tIns="0" rIns="0" bIns="0" rtlCol="0" anchor="ctr"/>
-          <a:lstStyle/>
-          <a:p>
-            <a:pPr marL="0" indent="0">
-              <a:buNone/>
-            </a:pPr>
-            <a:r>
-              <a:rPr lang="en-US" sz="3100" b="1" dirty="0">
-                <a:solidFill>
-                  <a:srgbClr val="16182B"/>
-                </a:solidFill>
-                <a:latin typeface="Cambria" pitchFamily="34" charset="0"/>
-                <a:ea typeface="Cambria" pitchFamily="34" charset="-122"/>
-                <a:cs typeface="Cambria" pitchFamily="34" charset="-120"/>
-              </a:rPr>
-              <a:t>Who actually does the animating?</a:t>
-            </a:r>
-            <a:endParaRPr lang="en-US" sz="3100" dirty="0"/>
-          </a:p>
-        </p:txBody>
-      </p:sp>
-      <p:sp>
-        <p:nvSpPr>
-          <p:cNvPr id="5" name="Shape 3"/>
-          <p:cNvSpPr/>
-          <p:nvPr/>
-        </p:nvSpPr>
-        <p:spPr>
-          <a:xfrm>
-            <a:off x="640080" y="1600200"/>
-            <a:ext cx="6766560" cy="868680"/>
-          </a:xfrm>
-          <a:prstGeom prst="roundRect">
-            <a:avLst>
-              <a:gd name="adj" fmla="val 8421"/>
-            </a:avLst>
-          </a:prstGeom>
-          <a:solidFill>
-            <a:srgbClr val="F6F2E9"/>
-          </a:solidFill>
-          <a:ln w="12700">
-            <a:solidFill>
-              <a:srgbClr val="F6F2E9"/>
-            </a:solidFill>
-            <a:prstDash val="solid"/>
-          </a:ln>
-        </p:spPr>
-        <p:txBody>
-          <a:bodyPr/>
-          <a:lstStyle/>
-          <a:p>
-            <a:endParaRPr lang="en-US"/>
-          </a:p>
-        </p:txBody>
-      </p:sp>
-      <p:sp>
-        <p:nvSpPr>
-          <p:cNvPr id="6" name="Text 4"/>
-          <p:cNvSpPr txBox="1"/>
-          <p:nvPr/>
-        </p:nvSpPr>
-        <p:spPr>
-          <a:xfrm>
-            <a:off x="914400" y="1600200"/>
-            <a:ext cx="1371600" cy="868680"/>
-          </a:xfrm>
-          <a:prstGeom prst="rect">
-            <a:avLst/>
-          </a:prstGeom>
-          <a:noFill/>
-          <a:ln/>
-        </p:spPr>
-        <p:txBody>
-          <a:bodyPr wrap="square" lIns="0" tIns="0" rIns="0" bIns="0" rtlCol="0" anchor="ctr"/>
-          <a:lstStyle/>
-          <a:p>
-            <a:pPr marL="0" indent="0">
-              <a:buNone/>
-            </a:pPr>
-            <a:r>
-              <a:rPr lang="en-US" sz="1600" b="1" dirty="0">
-                <a:solidFill>
-                  <a:srgbClr val="16182B"/>
-                </a:solidFill>
-                <a:latin typeface="Cambria" pitchFamily="34" charset="0"/>
-                <a:ea typeface="Cambria" pitchFamily="34" charset="-122"/>
-                <a:cs typeface="Cambria" pitchFamily="34" charset="-120"/>
-              </a:rPr>
-              <a:t>Warmth</a:t>
-            </a:r>
-            <a:endParaRPr lang="en-US" sz="1600" dirty="0"/>
-          </a:p>
-        </p:txBody>
-      </p:sp>
-      <p:sp>
-        <p:nvSpPr>
-          <p:cNvPr id="7" name="Text 5"/>
-          <p:cNvSpPr txBox="1"/>
-          <p:nvPr/>
-        </p:nvSpPr>
-        <p:spPr>
-          <a:xfrm>
-            <a:off x="2331720" y="1600200"/>
-            <a:ext cx="4892040" cy="868680"/>
-          </a:xfrm>
-          <a:prstGeom prst="rect">
-            <a:avLst/>
-          </a:prstGeom>
-          <a:noFill/>
-          <a:ln/>
-        </p:spPr>
-        <p:txBody>
-          <a:bodyPr wrap="square" lIns="0" tIns="0" rIns="0" bIns="0" rtlCol="0" anchor="ctr"/>
-          <a:lstStyle/>
-          <a:p>
-            <a:pPr marL="0" indent="0">
-              <a:lnSpc>
-                <a:spcPts val="1600"/>
-              </a:lnSpc>
-              <a:buNone/>
-            </a:pPr>
-            <a:r>
-              <a:rPr lang="en-US" sz="1250" dirty="0">
-                <a:solidFill>
-                  <a:srgbClr val="5F6478"/>
-                </a:solidFill>
-                <a:latin typeface="Calibri" pitchFamily="34" charset="0"/>
-                <a:ea typeface="Calibri" pitchFamily="34" charset="-122"/>
-                <a:cs typeface="Calibri" pitchFamily="34" charset="-120"/>
-              </a:rPr>
-              <a:t>He returns home, leans over the couch and kisses the figure. It is warm. He kisses again and touches, and the ivory begins to yield.</a:t>
-            </a:r>
-            <a:endParaRPr lang="en-US" sz="1250" dirty="0"/>
-          </a:p>
-        </p:txBody>
-      </p:sp>
-      <p:sp>
-        <p:nvSpPr>
-          <p:cNvPr id="8" name="Shape 6"/>
-          <p:cNvSpPr/>
-          <p:nvPr/>
-        </p:nvSpPr>
-        <p:spPr>
-          <a:xfrm>
-            <a:off x="640080" y="2569464"/>
-            <a:ext cx="6766560" cy="868680"/>
-          </a:xfrm>
-          <a:prstGeom prst="roundRect">
-            <a:avLst>
-              <a:gd name="adj" fmla="val 8421"/>
-            </a:avLst>
-          </a:prstGeom>
-          <a:solidFill>
-            <a:srgbClr val="E7F0F2"/>
-          </a:solidFill>
-          <a:ln w="12700">
-            <a:solidFill>
-              <a:srgbClr val="E7F0F2"/>
-            </a:solidFill>
-            <a:prstDash val="solid"/>
-          </a:ln>
-        </p:spPr>
-        <p:txBody>
-          <a:bodyPr/>
-          <a:lstStyle/>
-          <a:p>
-            <a:endParaRPr lang="en-US"/>
-          </a:p>
-        </p:txBody>
-      </p:sp>
-      <p:sp>
-        <p:nvSpPr>
-          <p:cNvPr id="9" name="Text 7"/>
-          <p:cNvSpPr txBox="1"/>
-          <p:nvPr/>
-        </p:nvSpPr>
-        <p:spPr>
-          <a:xfrm>
-            <a:off x="914400" y="2569464"/>
-            <a:ext cx="1371600" cy="868680"/>
-          </a:xfrm>
-          <a:prstGeom prst="rect">
-            <a:avLst/>
-          </a:prstGeom>
-          <a:noFill/>
-          <a:ln/>
-        </p:spPr>
-        <p:txBody>
-          <a:bodyPr wrap="square" lIns="0" tIns="0" rIns="0" bIns="0" rtlCol="0" anchor="ctr"/>
-          <a:lstStyle/>
-          <a:p>
-            <a:pPr marL="0" indent="0">
-              <a:buNone/>
-            </a:pPr>
-            <a:r>
-              <a:rPr lang="en-US" sz="1600" b="1" dirty="0">
-                <a:solidFill>
-                  <a:srgbClr val="2E7D8C"/>
-                </a:solidFill>
-                <a:latin typeface="Cambria" pitchFamily="34" charset="0"/>
-                <a:ea typeface="Cambria" pitchFamily="34" charset="-122"/>
-                <a:cs typeface="Cambria" pitchFamily="34" charset="-120"/>
-              </a:rPr>
-              <a:t>The simile</a:t>
-            </a:r>
-            <a:endParaRPr lang="en-US" sz="1600" dirty="0"/>
-          </a:p>
-        </p:txBody>
-      </p:sp>
-      <p:sp>
-        <p:nvSpPr>
-          <p:cNvPr id="10" name="Text 8"/>
-          <p:cNvSpPr txBox="1"/>
-          <p:nvPr/>
-        </p:nvSpPr>
-        <p:spPr>
-          <a:xfrm>
-            <a:off x="2331720" y="2569464"/>
-            <a:ext cx="4892040" cy="868680"/>
-          </a:xfrm>
-          <a:prstGeom prst="rect">
-            <a:avLst/>
-          </a:prstGeom>
-          <a:noFill/>
-          <a:ln/>
-        </p:spPr>
-        <p:txBody>
-          <a:bodyPr wrap="square" lIns="0" tIns="0" rIns="0" bIns="0" rtlCol="0" anchor="ctr"/>
-          <a:lstStyle/>
-          <a:p>
-            <a:pPr marL="0" indent="0">
-              <a:lnSpc>
-                <a:spcPts val="1600"/>
-              </a:lnSpc>
-              <a:buNone/>
-            </a:pPr>
-            <a:r>
-              <a:rPr lang="en-US" sz="1250" dirty="0">
-                <a:solidFill>
-                  <a:srgbClr val="5F6478"/>
-                </a:solidFill>
-                <a:latin typeface="Calibri" pitchFamily="34" charset="0"/>
-                <a:ea typeface="Calibri" pitchFamily="34" charset="-122"/>
-                <a:cs typeface="Calibri" pitchFamily="34" charset="-120"/>
-              </a:rPr>
-              <a:t>Ovid compares the softening to beeswax from Mount Hymettus worked under the thumb — an image of material becoming pliable through handling.</a:t>
-            </a:r>
-            <a:endParaRPr lang="en-US" sz="1250" dirty="0"/>
-          </a:p>
-        </p:txBody>
-      </p:sp>
-      <p:sp>
-        <p:nvSpPr>
-          <p:cNvPr id="11" name="Shape 9"/>
-          <p:cNvSpPr/>
-          <p:nvPr/>
-        </p:nvSpPr>
-        <p:spPr>
-          <a:xfrm>
-            <a:off x="640080" y="3538728"/>
-            <a:ext cx="6766560" cy="868680"/>
-          </a:xfrm>
-          <a:prstGeom prst="roundRect">
-            <a:avLst>
-              <a:gd name="adj" fmla="val 8421"/>
-            </a:avLst>
-          </a:prstGeom>
-          <a:solidFill>
-            <a:srgbClr val="F6F2E9"/>
-          </a:solidFill>
-          <a:ln w="12700">
-            <a:solidFill>
-              <a:srgbClr val="F6F2E9"/>
-            </a:solidFill>
-            <a:prstDash val="solid"/>
-          </a:ln>
-        </p:spPr>
-        <p:txBody>
-          <a:bodyPr/>
-          <a:lstStyle/>
-          <a:p>
-            <a:endParaRPr lang="en-US"/>
-          </a:p>
-        </p:txBody>
-      </p:sp>
-      <p:sp>
-        <p:nvSpPr>
-          <p:cNvPr id="12" name="Text 10"/>
-          <p:cNvSpPr txBox="1"/>
-          <p:nvPr/>
-        </p:nvSpPr>
-        <p:spPr>
-          <a:xfrm>
-            <a:off x="914400" y="3538728"/>
-            <a:ext cx="1371600" cy="868680"/>
-          </a:xfrm>
-          <a:prstGeom prst="rect">
-            <a:avLst/>
-          </a:prstGeom>
-          <a:noFill/>
-          <a:ln/>
-        </p:spPr>
-        <p:txBody>
-          <a:bodyPr wrap="square" lIns="0" tIns="0" rIns="0" bIns="0" rtlCol="0" anchor="ctr"/>
-          <a:lstStyle/>
-          <a:p>
-            <a:pPr marL="0" indent="0">
-              <a:buNone/>
-            </a:pPr>
-            <a:r>
-              <a:rPr lang="en-US" sz="1600" b="1" dirty="0">
-                <a:solidFill>
-                  <a:srgbClr val="16182B"/>
-                </a:solidFill>
-                <a:latin typeface="Cambria" pitchFamily="34" charset="0"/>
-                <a:ea typeface="Cambria" pitchFamily="34" charset="-122"/>
-                <a:cs typeface="Cambria" pitchFamily="34" charset="-120"/>
-              </a:rPr>
-              <a:t>Doubt</a:t>
-            </a:r>
-            <a:endParaRPr lang="en-US" sz="1600" dirty="0"/>
-          </a:p>
-        </p:txBody>
-      </p:sp>
-      <p:sp>
-        <p:nvSpPr>
-          <p:cNvPr id="13" name="Text 11"/>
-          <p:cNvSpPr txBox="1"/>
-          <p:nvPr/>
-        </p:nvSpPr>
-        <p:spPr>
-          <a:xfrm>
-            <a:off x="2331720" y="3538728"/>
-            <a:ext cx="4892040" cy="868680"/>
-          </a:xfrm>
-          <a:prstGeom prst="rect">
-            <a:avLst/>
-          </a:prstGeom>
-          <a:noFill/>
-          <a:ln/>
-        </p:spPr>
-        <p:txBody>
-          <a:bodyPr wrap="square" lIns="0" tIns="0" rIns="0" bIns="0" rtlCol="0" anchor="ctr"/>
-          <a:lstStyle/>
-          <a:p>
-            <a:pPr marL="0" indent="0">
-              <a:lnSpc>
-                <a:spcPts val="1600"/>
-              </a:lnSpc>
-              <a:buNone/>
-            </a:pPr>
-            <a:r>
-              <a:rPr lang="en-US" sz="1250" dirty="0">
-                <a:solidFill>
-                  <a:srgbClr val="5F6478"/>
-                </a:solidFill>
-                <a:latin typeface="Calibri" pitchFamily="34" charset="0"/>
-                <a:ea typeface="Calibri" pitchFamily="34" charset="-122"/>
-                <a:cs typeface="Calibri" pitchFamily="34" charset="-120"/>
-              </a:rPr>
-              <a:t>He tests it again, and again. The text dwells on his disbelief far longer than on his joy: he is afraid he is mistaken.</a:t>
-            </a:r>
-            <a:endParaRPr lang="en-US" sz="1250" dirty="0"/>
-          </a:p>
-        </p:txBody>
-      </p:sp>
-      <p:sp>
-        <p:nvSpPr>
-          <p:cNvPr id="14" name="Shape 12"/>
-          <p:cNvSpPr/>
-          <p:nvPr/>
-        </p:nvSpPr>
-        <p:spPr>
-          <a:xfrm>
-            <a:off x="640080" y="4507992"/>
-            <a:ext cx="6766560" cy="868680"/>
-          </a:xfrm>
-          <a:prstGeom prst="roundRect">
-            <a:avLst>
-              <a:gd name="adj" fmla="val 8421"/>
-            </a:avLst>
-          </a:prstGeom>
-          <a:solidFill>
-            <a:srgbClr val="E7F0F2"/>
-          </a:solidFill>
-          <a:ln w="12700">
-            <a:solidFill>
-              <a:srgbClr val="E7F0F2"/>
-            </a:solidFill>
-            <a:prstDash val="solid"/>
-          </a:ln>
-        </p:spPr>
-        <p:txBody>
-          <a:bodyPr/>
-          <a:lstStyle/>
-          <a:p>
-            <a:endParaRPr lang="en-US"/>
-          </a:p>
-        </p:txBody>
-      </p:sp>
-      <p:sp>
-        <p:nvSpPr>
-          <p:cNvPr id="15" name="Text 13"/>
-          <p:cNvSpPr txBox="1"/>
-          <p:nvPr/>
-        </p:nvSpPr>
-        <p:spPr>
-          <a:xfrm>
-            <a:off x="914400" y="4507992"/>
-            <a:ext cx="1371600" cy="868680"/>
-          </a:xfrm>
-          <a:prstGeom prst="rect">
-            <a:avLst/>
-          </a:prstGeom>
-          <a:noFill/>
-          <a:ln/>
-        </p:spPr>
-        <p:txBody>
-          <a:bodyPr wrap="square" lIns="0" tIns="0" rIns="0" bIns="0" rtlCol="0" anchor="ctr"/>
-          <a:lstStyle/>
-          <a:p>
-            <a:pPr marL="0" indent="0">
-              <a:buNone/>
-            </a:pPr>
-            <a:r>
-              <a:rPr lang="en-US" sz="1600" b="1" dirty="0">
-                <a:solidFill>
-                  <a:srgbClr val="2E7D8C"/>
-                </a:solidFill>
-                <a:latin typeface="Cambria" pitchFamily="34" charset="0"/>
-                <a:ea typeface="Cambria" pitchFamily="34" charset="-122"/>
-                <a:cs typeface="Cambria" pitchFamily="34" charset="-120"/>
-              </a:rPr>
-              <a:t>The pulse</a:t>
-            </a:r>
-            <a:endParaRPr lang="en-US" sz="1600" dirty="0"/>
-          </a:p>
-        </p:txBody>
-      </p:sp>
-      <p:sp>
-        <p:nvSpPr>
-          <p:cNvPr id="16" name="Text 14"/>
-          <p:cNvSpPr txBox="1"/>
-          <p:nvPr/>
-        </p:nvSpPr>
-        <p:spPr>
-          <a:xfrm>
-            <a:off x="2331720" y="4507992"/>
-            <a:ext cx="4892040" cy="868680"/>
-          </a:xfrm>
-          <a:prstGeom prst="rect">
-            <a:avLst/>
-          </a:prstGeom>
-          <a:noFill/>
-          <a:ln/>
-        </p:spPr>
-        <p:txBody>
-          <a:bodyPr wrap="square" lIns="0" tIns="0" rIns="0" bIns="0" rtlCol="0" anchor="ctr"/>
-          <a:lstStyle/>
-          <a:p>
-            <a:pPr marL="0" indent="0">
-              <a:lnSpc>
-                <a:spcPts val="1600"/>
-              </a:lnSpc>
-              <a:buNone/>
-            </a:pPr>
-            <a:r>
-              <a:rPr lang="en-US" sz="1250" dirty="0">
-                <a:solidFill>
-                  <a:srgbClr val="5F6478"/>
-                </a:solidFill>
-                <a:latin typeface="Calibri" pitchFamily="34" charset="0"/>
-                <a:ea typeface="Calibri" pitchFamily="34" charset="-122"/>
-                <a:cs typeface="Calibri" pitchFamily="34" charset="-120"/>
-              </a:rPr>
-              <a:t>Veins beat under his thumb. Only then does he thank Venus — and the poem is careful to say she is the one who brought the marriage about.</a:t>
-            </a:r>
-            <a:endParaRPr lang="en-US" sz="1250" dirty="0"/>
-          </a:p>
-        </p:txBody>
-      </p:sp>
-      <p:sp>
-        <p:nvSpPr>
-          <p:cNvPr id="17" name="Shape 15"/>
-          <p:cNvSpPr/>
-          <p:nvPr/>
-        </p:nvSpPr>
-        <p:spPr>
-          <a:xfrm>
-            <a:off x="7680960" y="1600200"/>
-            <a:ext cx="3840480" cy="3831336"/>
-          </a:xfrm>
-          <a:prstGeom prst="roundRect">
-            <a:avLst>
-              <a:gd name="adj" fmla="val 1909"/>
-            </a:avLst>
-          </a:prstGeom>
-          <a:solidFill>
-            <a:srgbClr val="16182B"/>
-          </a:solidFill>
-          <a:ln w="12700">
-            <a:solidFill>
-              <a:srgbClr val="16182B"/>
-            </a:solidFill>
-            <a:prstDash val="solid"/>
-          </a:ln>
-        </p:spPr>
-        <p:txBody>
-          <a:bodyPr/>
-          <a:lstStyle/>
-          <a:p>
-            <a:endParaRPr lang="en-US"/>
-          </a:p>
-        </p:txBody>
-      </p:sp>
-      <p:sp>
-        <p:nvSpPr>
-          <p:cNvPr id="18" name="Text 16"/>
-          <p:cNvSpPr txBox="1"/>
-          <p:nvPr/>
-        </p:nvSpPr>
-        <p:spPr>
-          <a:xfrm>
-            <a:off x="8001000" y="1828800"/>
-            <a:ext cx="3291840" cy="292608"/>
-          </a:xfrm>
-          <a:prstGeom prst="rect">
-            <a:avLst/>
-          </a:prstGeom>
-          <a:noFill/>
-          <a:ln/>
-        </p:spPr>
-        <p:txBody>
-          <a:bodyPr wrap="square" lIns="0" tIns="0" rIns="0" bIns="0" rtlCol="0" anchor="ctr"/>
-          <a:lstStyle/>
-          <a:p>
-            <a:pPr marL="0" indent="0">
-              <a:buNone/>
-            </a:pPr>
-            <a:r>
-              <a:rPr lang="en-US" sz="1100" b="1" kern="0" spc="140" dirty="0">
-                <a:solidFill>
-                  <a:srgbClr val="C9A227"/>
-                </a:solidFill>
-                <a:latin typeface="Calibri" pitchFamily="34" charset="0"/>
-                <a:ea typeface="Calibri" pitchFamily="34" charset="-122"/>
-                <a:cs typeface="Calibri" pitchFamily="34" charset="-120"/>
-              </a:rPr>
-              <a:t>The load-bearing point</a:t>
-            </a:r>
-            <a:endParaRPr lang="en-US" sz="1100" dirty="0"/>
-          </a:p>
-        </p:txBody>
-      </p:sp>
-      <p:sp>
-        <p:nvSpPr>
-          <p:cNvPr id="19" name="Text 17"/>
-          <p:cNvSpPr txBox="1"/>
-          <p:nvPr/>
-        </p:nvSpPr>
-        <p:spPr>
-          <a:xfrm>
-            <a:off x="8001000" y="2194560"/>
-            <a:ext cx="3246120" cy="3017520"/>
-          </a:xfrm>
-          <a:prstGeom prst="rect">
-            <a:avLst/>
-          </a:prstGeom>
-          <a:noFill/>
-          <a:ln/>
-        </p:spPr>
-        <p:txBody>
-          <a:bodyPr wrap="square" lIns="0" tIns="0" rIns="0" bIns="0" rtlCol="0" anchor="ctr"/>
-          <a:lstStyle/>
-          <a:p>
-            <a:pPr marL="0" indent="0">
-              <a:lnSpc>
-                <a:spcPts val="2100"/>
-              </a:lnSpc>
-              <a:buNone/>
-            </a:pPr>
-            <a:r>
-              <a:rPr lang="en-US" sz="1450" dirty="0">
-                <a:solidFill>
-                  <a:srgbClr val="EDE6D6"/>
-                </a:solidFill>
-                <a:latin typeface="Cambria" pitchFamily="34" charset="0"/>
-                <a:ea typeface="Cambria" pitchFamily="34" charset="-122"/>
-                <a:cs typeface="Cambria" pitchFamily="34" charset="-120"/>
-              </a:rPr>
-              <a:t>Pygmalion does not bring her to life.</a:t>
-            </a:r>
-            <a:endParaRPr lang="en-US" sz="1450" dirty="0"/>
-          </a:p>
-          <a:p>
-            <a:pPr marL="0" indent="0">
-              <a:lnSpc>
-                <a:spcPts val="2100"/>
-              </a:lnSpc>
-              <a:buNone/>
-            </a:pPr>
-            <a:endParaRPr lang="en-US" sz="1450" dirty="0"/>
-          </a:p>
-          <a:p>
-            <a:pPr marL="0" indent="0">
-              <a:lnSpc>
-                <a:spcPts val="2100"/>
-              </a:lnSpc>
-              <a:buNone/>
-            </a:pPr>
-            <a:r>
-              <a:rPr lang="en-US" sz="1450" dirty="0">
-                <a:solidFill>
-                  <a:srgbClr val="EDE6D6"/>
-                </a:solidFill>
-                <a:latin typeface="Cambria" pitchFamily="34" charset="0"/>
-                <a:ea typeface="Cambria" pitchFamily="34" charset="-122"/>
-                <a:cs typeface="Cambria" pitchFamily="34" charset="-120"/>
-              </a:rPr>
-              <a:t>His competence ends at the likeness. The life is granted by a goddess, off-page, in response to a wish he would not say.</a:t>
-            </a:r>
-            <a:endParaRPr lang="en-US" sz="1450" dirty="0"/>
-          </a:p>
-          <a:p>
-            <a:pPr marL="0" indent="0">
-              <a:lnSpc>
-                <a:spcPts val="2100"/>
-              </a:lnSpc>
-              <a:buNone/>
-            </a:pPr>
-            <a:endParaRPr lang="en-US" sz="1450" dirty="0"/>
-          </a:p>
-          <a:p>
-            <a:pPr marL="0" indent="0">
-              <a:lnSpc>
-                <a:spcPts val="2100"/>
-              </a:lnSpc>
-              <a:buNone/>
-            </a:pPr>
-            <a:r>
-              <a:rPr lang="en-US" sz="1450" dirty="0">
-                <a:solidFill>
-                  <a:srgbClr val="EDE6D6"/>
-                </a:solidFill>
-                <a:latin typeface="Cambria" pitchFamily="34" charset="0"/>
-                <a:ea typeface="Cambria" pitchFamily="34" charset="-122"/>
-                <a:cs typeface="Cambria" pitchFamily="34" charset="-120"/>
-              </a:rPr>
-              <a:t>In our stories, what plays the part of Venus? Scale. Emergence. Data. A threshold crossed. Ask what each of those words lets a maker avoid claiming.</a:t>
-            </a:r>
-            <a:endParaRPr lang="en-US" sz="1450" dirty="0"/>
-          </a:p>
-        </p:txBody>
-      </p:sp>
-      <p:sp>
-        <p:nvSpPr>
-          <p:cNvPr id="20" name="Text 18"/>
-          <p:cNvSpPr txBox="1"/>
-          <p:nvPr/>
-        </p:nvSpPr>
-        <p:spPr>
-          <a:xfrm>
-            <a:off x="640080" y="6272784"/>
-            <a:ext cx="10911535" cy="274320"/>
-          </a:xfrm>
-          <a:prstGeom prst="rect">
-            <a:avLst/>
-          </a:prstGeom>
-          <a:noFill/>
-          <a:ln/>
-        </p:spPr>
-        <p:txBody>
-          <a:bodyPr wrap="square" lIns="0" tIns="0" rIns="0" bIns="0" rtlCol="0" anchor="ctr"/>
-          <a:lstStyle/>
-          <a:p>
-            <a:pPr marL="0" indent="0">
-              <a:buNone/>
-            </a:pPr>
-            <a:r>
-              <a:rPr lang="en-US" sz="1000" i="1" dirty="0">
-                <a:solidFill>
-                  <a:srgbClr val="5F6478"/>
-                </a:solidFill>
-                <a:latin typeface="Calibri" pitchFamily="34" charset="0"/>
-                <a:ea typeface="Calibri" pitchFamily="34" charset="-122"/>
-                <a:cs typeface="Calibri" pitchFamily="34" charset="-120"/>
-              </a:rPr>
-              <a:t>Ovid, Metamorphoses Bk X:280–294 (trans. Kline).</a:t>
-            </a:r>
-            <a:endParaRPr lang="en-US" sz="1000" dirty="0"/>
-          </a:p>
-        </p:txBody>
-      </p:sp>
-    </p:spTree>
-  </p:cSld>
-  <p:clrMapOvr>
-    <a:masterClrMapping/>
-  </p:clrMapOvr>
-</p:sld>
-</file>
-
-<file path=ppt/slides/slide11.xml><?xml version="1.0" encoding="utf-8"?>
-<p:sld xmlns:a="http://schemas.openxmlformats.org/drawingml/2006/main" xmlns:r="http://schemas.openxmlformats.org/officeDocument/2006/relationships" xmlns:p="http://schemas.openxmlformats.org/presentationml/2006/main">
   <p:cSld name="Slide 12">
     <p:bg>
       <p:bgPr>
@@ -4738,7 +3855,7 @@
 </p:sld>
 </file>
 
-<file path=ppt/slides/slide12.xml><?xml version="1.0" encoding="utf-8"?>
+<file path=ppt/slides/slide11.xml><?xml version="1.0" encoding="utf-8"?>
 <p:sld xmlns:a="http://schemas.openxmlformats.org/drawingml/2006/main" xmlns:r="http://schemas.openxmlformats.org/officeDocument/2006/relationships" xmlns:p="http://schemas.openxmlformats.org/presentationml/2006/main">
   <p:cSld name="Slide 13">
     <p:bg>
@@ -5639,7 +4756,7 @@
 </p:sld>
 </file>
 
-<file path=ppt/slides/slide13.xml><?xml version="1.0" encoding="utf-8"?>
+<file path=ppt/slides/slide12.xml><?xml version="1.0" encoding="utf-8"?>
 <p:sld xmlns:a="http://schemas.openxmlformats.org/drawingml/2006/main" xmlns:r="http://schemas.openxmlformats.org/officeDocument/2006/relationships" xmlns:p="http://schemas.openxmlformats.org/presentationml/2006/main">
   <p:cSld name="Slide 14">
     <p:bg>
@@ -7202,7 +6319,7 @@
 </p:sld>
 </file>
 
-<file path=ppt/slides/slide14.xml><?xml version="1.0" encoding="utf-8"?>
+<file path=ppt/slides/slide13.xml><?xml version="1.0" encoding="utf-8"?>
 <p:sld xmlns:a="http://schemas.openxmlformats.org/drawingml/2006/main" xmlns:r="http://schemas.openxmlformats.org/officeDocument/2006/relationships" xmlns:p="http://schemas.openxmlformats.org/presentationml/2006/main">
   <p:cSld name="Slide 15">
     <p:bg>
@@ -7805,7 +6922,7 @@
 </p:sld>
 </file>
 
-<file path=ppt/slides/slide15.xml><?xml version="1.0" encoding="utf-8"?>
+<file path=ppt/slides/slide14.xml><?xml version="1.0" encoding="utf-8"?>
 <p:sld xmlns:a="http://schemas.openxmlformats.org/drawingml/2006/main" xmlns:r="http://schemas.openxmlformats.org/officeDocument/2006/relationships" xmlns:p="http://schemas.openxmlformats.org/presentationml/2006/main">
   <p:cSld name="Slide 16">
     <p:bg>
@@ -8079,7 +7196,7 @@
 </p:sld>
 </file>
 
-<file path=ppt/slides/slide16.xml><?xml version="1.0" encoding="utf-8"?>
+<file path=ppt/slides/slide15.xml><?xml version="1.0" encoding="utf-8"?>
 <p:sld xmlns:a="http://schemas.openxmlformats.org/drawingml/2006/main" xmlns:r="http://schemas.openxmlformats.org/officeDocument/2006/relationships" xmlns:p="http://schemas.openxmlformats.org/presentationml/2006/main">
   <p:cSld name="Slide 17">
     <p:bg>
@@ -8716,7 +7833,7 @@
 </p:sld>
 </file>
 
-<file path=ppt/slides/slide17.xml><?xml version="1.0" encoding="utf-8"?>
+<file path=ppt/slides/slide16.xml><?xml version="1.0" encoding="utf-8"?>
 <p:sld xmlns:a="http://schemas.openxmlformats.org/drawingml/2006/main" xmlns:r="http://schemas.openxmlformats.org/officeDocument/2006/relationships" xmlns:p="http://schemas.openxmlformats.org/presentationml/2006/main">
   <p:cSld name="Slide 18">
     <p:bg>
@@ -9238,7 +8355,7 @@
 </p:sld>
 </file>
 
-<file path=ppt/slides/slide18.xml><?xml version="1.0" encoding="utf-8"?>
+<file path=ppt/slides/slide17.xml><?xml version="1.0" encoding="utf-8"?>
 <p:sld xmlns:a="http://schemas.openxmlformats.org/drawingml/2006/main" xmlns:r="http://schemas.openxmlformats.org/officeDocument/2006/relationships" xmlns:p="http://schemas.openxmlformats.org/presentationml/2006/main">
   <p:cSld name="Slide 19">
     <p:bg>
@@ -10427,7 +9544,7 @@
 </p:sld>
 </file>
 
-<file path=ppt/slides/slide19.xml><?xml version="1.0" encoding="utf-8"?>
+<file path=ppt/slides/slide18.xml><?xml version="1.0" encoding="utf-8"?>
 <p:sld xmlns:a="http://schemas.openxmlformats.org/drawingml/2006/main" xmlns:r="http://schemas.openxmlformats.org/officeDocument/2006/relationships" xmlns:p="http://schemas.openxmlformats.org/presentationml/2006/main">
   <p:cSld name="Slide 20">
     <p:bg>
@@ -11012,6 +10129,643 @@
               <a:t>The question the poem actually poses is not whether her words are hers. It is whether originality is the right test for whether something is speaking — and if it is not, what should replace it.</a:t>
             </a:r>
             <a:endParaRPr lang="en-US" sz="1600" dirty="0"/>
+          </a:p>
+        </p:txBody>
+      </p:sp>
+    </p:spTree>
+  </p:cSld>
+  <p:clrMapOvr>
+    <a:masterClrMapping/>
+  </p:clrMapOvr>
+</p:sld>
+</file>
+
+<file path=ppt/slides/slide19.xml><?xml version="1.0" encoding="utf-8"?>
+<p:sld xmlns:a="http://schemas.openxmlformats.org/drawingml/2006/main" xmlns:r="http://schemas.openxmlformats.org/officeDocument/2006/relationships" xmlns:p="http://schemas.openxmlformats.org/presentationml/2006/main">
+  <p:cSld name="Slide 21">
+    <p:bg>
+      <p:bgPr>
+        <a:solidFill>
+          <a:srgbClr val="FFFFFF"/>
+        </a:solidFill>
+        <a:effectLst/>
+      </p:bgPr>
+    </p:bg>
+    <p:spTree>
+      <p:nvGrpSpPr>
+        <p:cNvPr id="1" name=""/>
+        <p:cNvGrpSpPr/>
+        <p:nvPr/>
+      </p:nvGrpSpPr>
+      <p:grpSpPr>
+        <a:xfrm>
+          <a:off x="0" y="0"/>
+          <a:ext cx="0" cy="0"/>
+          <a:chOff x="0" y="0"/>
+          <a:chExt cx="0" cy="0"/>
+        </a:xfrm>
+      </p:grpSpPr>
+      <p:sp>
+        <p:nvSpPr>
+          <p:cNvPr id="2" name="Shape 0"/>
+          <p:cNvSpPr/>
+          <p:nvPr/>
+        </p:nvSpPr>
+        <p:spPr>
+          <a:xfrm>
+            <a:off x="640080" y="429768"/>
+            <a:ext cx="137160" cy="137160"/>
+          </a:xfrm>
+          <a:prstGeom prst="ellipse">
+            <a:avLst/>
+          </a:prstGeom>
+          <a:solidFill>
+            <a:srgbClr val="C9A227"/>
+          </a:solidFill>
+          <a:ln/>
+        </p:spPr>
+        <p:txBody>
+          <a:bodyPr/>
+          <a:lstStyle/>
+          <a:p>
+            <a:endParaRPr lang="en-US"/>
+          </a:p>
+        </p:txBody>
+      </p:sp>
+      <p:sp>
+        <p:nvSpPr>
+          <p:cNvPr id="3" name="Text 1"/>
+          <p:cNvSpPr txBox="1"/>
+          <p:nvPr/>
+        </p:nvSpPr>
+        <p:spPr>
+          <a:xfrm>
+            <a:off x="886968" y="365760"/>
+            <a:ext cx="10058400" cy="274320"/>
+          </a:xfrm>
+          <a:prstGeom prst="rect">
+            <a:avLst/>
+          </a:prstGeom>
+          <a:noFill/>
+          <a:ln/>
+        </p:spPr>
+        <p:txBody>
+          <a:bodyPr wrap="square" lIns="0" tIns="0" rIns="0" bIns="0" rtlCol="0" anchor="ctr"/>
+          <a:lstStyle/>
+          <a:p>
+            <a:pPr marL="0" indent="0">
+              <a:buNone/>
+            </a:pPr>
+            <a:r>
+              <a:rPr lang="en-US" sz="1100" b="1" kern="0" spc="160" dirty="0">
+                <a:solidFill>
+                  <a:srgbClr val="5F6478"/>
+                </a:solidFill>
+                <a:latin typeface="Calibri" pitchFamily="34" charset="0"/>
+                <a:ea typeface="Calibri" pitchFamily="34" charset="-122"/>
+                <a:cs typeface="Calibri" pitchFamily="34" charset="-120"/>
+              </a:rPr>
+              <a:t>BK III:402–436</a:t>
+            </a:r>
+            <a:endParaRPr lang="en-US" sz="1100" dirty="0"/>
+          </a:p>
+        </p:txBody>
+      </p:sp>
+      <p:sp>
+        <p:nvSpPr>
+          <p:cNvPr id="4" name="Text 2"/>
+          <p:cNvSpPr txBox="1"/>
+          <p:nvPr/>
+        </p:nvSpPr>
+        <p:spPr>
+          <a:xfrm>
+            <a:off x="640080" y="713232"/>
+            <a:ext cx="10911535" cy="658368"/>
+          </a:xfrm>
+          <a:prstGeom prst="rect">
+            <a:avLst/>
+          </a:prstGeom>
+          <a:noFill/>
+          <a:ln/>
+        </p:spPr>
+        <p:txBody>
+          <a:bodyPr wrap="square" lIns="0" tIns="0" rIns="0" bIns="0" rtlCol="0" anchor="ctr"/>
+          <a:lstStyle/>
+          <a:p>
+            <a:pPr marL="0" indent="0">
+              <a:buNone/>
+            </a:pPr>
+            <a:r>
+              <a:rPr lang="en-US" sz="3100" b="1" dirty="0">
+                <a:solidFill>
+                  <a:srgbClr val="16182B"/>
+                </a:solidFill>
+                <a:latin typeface="Cambria" pitchFamily="34" charset="0"/>
+                <a:ea typeface="Cambria" pitchFamily="34" charset="-122"/>
+                <a:cs typeface="Cambria" pitchFamily="34" charset="-120"/>
+              </a:rPr>
+              <a:t>The pool is a designed surface</a:t>
+            </a:r>
+            <a:endParaRPr lang="en-US" sz="3100" dirty="0"/>
+          </a:p>
+        </p:txBody>
+      </p:sp>
+      <p:sp>
+        <p:nvSpPr>
+          <p:cNvPr id="5" name="Shape 3"/>
+          <p:cNvSpPr/>
+          <p:nvPr/>
+        </p:nvSpPr>
+        <p:spPr>
+          <a:xfrm>
+            <a:off x="640080" y="1600200"/>
+            <a:ext cx="10911535" cy="1042416"/>
+          </a:xfrm>
+          <a:prstGeom prst="roundRect">
+            <a:avLst>
+              <a:gd name="adj" fmla="val 7018"/>
+            </a:avLst>
+          </a:prstGeom>
+          <a:solidFill>
+            <a:srgbClr val="F6F2E9"/>
+          </a:solidFill>
+          <a:ln w="12700">
+            <a:solidFill>
+              <a:srgbClr val="F6F2E9"/>
+            </a:solidFill>
+            <a:prstDash val="solid"/>
+          </a:ln>
+        </p:spPr>
+        <p:txBody>
+          <a:bodyPr/>
+          <a:lstStyle/>
+          <a:p>
+            <a:endParaRPr lang="en-US"/>
+          </a:p>
+        </p:txBody>
+      </p:sp>
+      <p:sp>
+        <p:nvSpPr>
+          <p:cNvPr id="6" name="Text 4"/>
+          <p:cNvSpPr txBox="1"/>
+          <p:nvPr/>
+        </p:nvSpPr>
+        <p:spPr>
+          <a:xfrm>
+            <a:off x="960120" y="1600200"/>
+            <a:ext cx="1691640" cy="1042416"/>
+          </a:xfrm>
+          <a:prstGeom prst="rect">
+            <a:avLst/>
+          </a:prstGeom>
+          <a:noFill/>
+          <a:ln/>
+        </p:spPr>
+        <p:txBody>
+          <a:bodyPr wrap="square" lIns="0" tIns="0" rIns="0" bIns="0" rtlCol="0" anchor="ctr"/>
+          <a:lstStyle/>
+          <a:p>
+            <a:pPr marL="0" indent="0">
+              <a:buNone/>
+            </a:pPr>
+            <a:r>
+              <a:rPr lang="en-US" sz="1700" b="1" dirty="0">
+                <a:solidFill>
+                  <a:srgbClr val="16182B"/>
+                </a:solidFill>
+                <a:latin typeface="Cambria" pitchFamily="34" charset="0"/>
+                <a:ea typeface="Cambria" pitchFamily="34" charset="-122"/>
+                <a:cs typeface="Cambria" pitchFamily="34" charset="-120"/>
+              </a:rPr>
+              <a:t>The curse</a:t>
+            </a:r>
+            <a:endParaRPr lang="en-US" sz="1700" dirty="0"/>
+          </a:p>
+        </p:txBody>
+      </p:sp>
+      <p:sp>
+        <p:nvSpPr>
+          <p:cNvPr id="7" name="Text 5"/>
+          <p:cNvSpPr txBox="1"/>
+          <p:nvPr/>
+        </p:nvSpPr>
+        <p:spPr>
+          <a:xfrm>
+            <a:off x="2788920" y="1600200"/>
+            <a:ext cx="8412480" cy="1042416"/>
+          </a:xfrm>
+          <a:prstGeom prst="rect">
+            <a:avLst/>
+          </a:prstGeom>
+          <a:noFill/>
+          <a:ln/>
+        </p:spPr>
+        <p:txBody>
+          <a:bodyPr wrap="square" lIns="0" tIns="0" rIns="0" bIns="0" rtlCol="0" anchor="ctr"/>
+          <a:lstStyle/>
+          <a:p>
+            <a:pPr marL="0" indent="0">
+              <a:lnSpc>
+                <a:spcPts val="1800"/>
+              </a:lnSpc>
+              <a:buNone/>
+            </a:pPr>
+            <a:r>
+              <a:rPr lang="en-US" sz="1300" dirty="0">
+                <a:solidFill>
+                  <a:srgbClr val="5F6478"/>
+                </a:solidFill>
+                <a:latin typeface="Calibri" pitchFamily="34" charset="0"/>
+                <a:ea typeface="Calibri" pitchFamily="34" charset="-122"/>
+                <a:cs typeface="Calibri" pitchFamily="34" charset="-120"/>
+              </a:rPr>
+              <a:t>A rejected suitor prays that Narcissus may love and never obtain what he loves. Nemesis grants it. The punishment is precisely reciprocal to what he did to Echo.</a:t>
+            </a:r>
+            <a:endParaRPr lang="en-US" sz="1300" dirty="0"/>
+          </a:p>
+        </p:txBody>
+      </p:sp>
+      <p:sp>
+        <p:nvSpPr>
+          <p:cNvPr id="8" name="Shape 6"/>
+          <p:cNvSpPr/>
+          <p:nvPr/>
+        </p:nvSpPr>
+        <p:spPr>
+          <a:xfrm>
+            <a:off x="640080" y="2715768"/>
+            <a:ext cx="10911535" cy="1042416"/>
+          </a:xfrm>
+          <a:prstGeom prst="roundRect">
+            <a:avLst>
+              <a:gd name="adj" fmla="val 7018"/>
+            </a:avLst>
+          </a:prstGeom>
+          <a:solidFill>
+            <a:srgbClr val="E7F0F2"/>
+          </a:solidFill>
+          <a:ln w="12700">
+            <a:solidFill>
+              <a:srgbClr val="E7F0F2"/>
+            </a:solidFill>
+            <a:prstDash val="solid"/>
+          </a:ln>
+        </p:spPr>
+        <p:txBody>
+          <a:bodyPr/>
+          <a:lstStyle/>
+          <a:p>
+            <a:endParaRPr lang="en-US"/>
+          </a:p>
+        </p:txBody>
+      </p:sp>
+      <p:sp>
+        <p:nvSpPr>
+          <p:cNvPr id="9" name="Text 7"/>
+          <p:cNvSpPr txBox="1"/>
+          <p:nvPr/>
+        </p:nvSpPr>
+        <p:spPr>
+          <a:xfrm>
+            <a:off x="960120" y="2715768"/>
+            <a:ext cx="1691640" cy="1042416"/>
+          </a:xfrm>
+          <a:prstGeom prst="rect">
+            <a:avLst/>
+          </a:prstGeom>
+          <a:noFill/>
+          <a:ln/>
+        </p:spPr>
+        <p:txBody>
+          <a:bodyPr wrap="square" lIns="0" tIns="0" rIns="0" bIns="0" rtlCol="0" anchor="ctr"/>
+          <a:lstStyle/>
+          <a:p>
+            <a:pPr marL="0" indent="0">
+              <a:buNone/>
+            </a:pPr>
+            <a:r>
+              <a:rPr lang="en-US" sz="1700" b="1" dirty="0">
+                <a:solidFill>
+                  <a:srgbClr val="16182B"/>
+                </a:solidFill>
+                <a:latin typeface="Cambria" pitchFamily="34" charset="0"/>
+                <a:ea typeface="Cambria" pitchFamily="34" charset="-122"/>
+                <a:cs typeface="Cambria" pitchFamily="34" charset="-120"/>
+              </a:rPr>
+              <a:t>The surface</a:t>
+            </a:r>
+            <a:endParaRPr lang="en-US" sz="1700" dirty="0"/>
+          </a:p>
+        </p:txBody>
+      </p:sp>
+      <p:sp>
+        <p:nvSpPr>
+          <p:cNvPr id="10" name="Text 8"/>
+          <p:cNvSpPr txBox="1"/>
+          <p:nvPr/>
+        </p:nvSpPr>
+        <p:spPr>
+          <a:xfrm>
+            <a:off x="2788920" y="2715768"/>
+            <a:ext cx="8412480" cy="1042416"/>
+          </a:xfrm>
+          <a:prstGeom prst="rect">
+            <a:avLst/>
+          </a:prstGeom>
+          <a:noFill/>
+          <a:ln/>
+        </p:spPr>
+        <p:txBody>
+          <a:bodyPr wrap="square" lIns="0" tIns="0" rIns="0" bIns="0" rtlCol="0" anchor="ctr"/>
+          <a:lstStyle/>
+          <a:p>
+            <a:pPr marL="0" indent="0">
+              <a:lnSpc>
+                <a:spcPts val="1800"/>
+              </a:lnSpc>
+              <a:buNone/>
+            </a:pPr>
+            <a:r>
+              <a:rPr lang="en-US" sz="1300" dirty="0">
+                <a:solidFill>
+                  <a:srgbClr val="5F6478"/>
+                </a:solidFill>
+                <a:latin typeface="Calibri" pitchFamily="34" charset="0"/>
+                <a:ea typeface="Calibri" pitchFamily="34" charset="-122"/>
+                <a:cs typeface="Calibri" pitchFamily="34" charset="-120"/>
+              </a:rPr>
+              <a:t>Ovid describes a spring no shepherd, goat, animal or bird has touched, unclouded, silver-bright, not even disturbed by a fallen branch. He spends real lines on how undisturbed it is.</a:t>
+            </a:r>
+            <a:endParaRPr lang="en-US" sz="1300" dirty="0"/>
+          </a:p>
+        </p:txBody>
+      </p:sp>
+      <p:sp>
+        <p:nvSpPr>
+          <p:cNvPr id="11" name="Shape 9"/>
+          <p:cNvSpPr/>
+          <p:nvPr/>
+        </p:nvSpPr>
+        <p:spPr>
+          <a:xfrm>
+            <a:off x="640080" y="3831336"/>
+            <a:ext cx="10911535" cy="1042416"/>
+          </a:xfrm>
+          <a:prstGeom prst="roundRect">
+            <a:avLst>
+              <a:gd name="adj" fmla="val 7018"/>
+            </a:avLst>
+          </a:prstGeom>
+          <a:solidFill>
+            <a:srgbClr val="F6F2E9"/>
+          </a:solidFill>
+          <a:ln w="12700">
+            <a:solidFill>
+              <a:srgbClr val="F6F2E9"/>
+            </a:solidFill>
+            <a:prstDash val="solid"/>
+          </a:ln>
+        </p:spPr>
+        <p:txBody>
+          <a:bodyPr/>
+          <a:lstStyle/>
+          <a:p>
+            <a:endParaRPr lang="en-US"/>
+          </a:p>
+        </p:txBody>
+      </p:sp>
+      <p:sp>
+        <p:nvSpPr>
+          <p:cNvPr id="12" name="Text 10"/>
+          <p:cNvSpPr txBox="1"/>
+          <p:nvPr/>
+        </p:nvSpPr>
+        <p:spPr>
+          <a:xfrm>
+            <a:off x="960120" y="3831336"/>
+            <a:ext cx="1691640" cy="1042416"/>
+          </a:xfrm>
+          <a:prstGeom prst="rect">
+            <a:avLst/>
+          </a:prstGeom>
+          <a:noFill/>
+          <a:ln/>
+        </p:spPr>
+        <p:txBody>
+          <a:bodyPr wrap="square" lIns="0" tIns="0" rIns="0" bIns="0" rtlCol="0" anchor="ctr"/>
+          <a:lstStyle/>
+          <a:p>
+            <a:pPr marL="0" indent="0">
+              <a:buNone/>
+            </a:pPr>
+            <a:r>
+              <a:rPr lang="en-US" sz="1700" b="1" dirty="0">
+                <a:solidFill>
+                  <a:srgbClr val="16182B"/>
+                </a:solidFill>
+                <a:latin typeface="Cambria" pitchFamily="34" charset="0"/>
+                <a:ea typeface="Cambria" pitchFamily="34" charset="-122"/>
+                <a:cs typeface="Cambria" pitchFamily="34" charset="-120"/>
+              </a:rPr>
+              <a:t>The mistake</a:t>
+            </a:r>
+            <a:endParaRPr lang="en-US" sz="1700" dirty="0"/>
+          </a:p>
+        </p:txBody>
+      </p:sp>
+      <p:sp>
+        <p:nvSpPr>
+          <p:cNvPr id="13" name="Text 11"/>
+          <p:cNvSpPr txBox="1"/>
+          <p:nvPr/>
+        </p:nvSpPr>
+        <p:spPr>
+          <a:xfrm>
+            <a:off x="2788920" y="3831336"/>
+            <a:ext cx="8412480" cy="1042416"/>
+          </a:xfrm>
+          <a:prstGeom prst="rect">
+            <a:avLst/>
+          </a:prstGeom>
+          <a:noFill/>
+          <a:ln/>
+        </p:spPr>
+        <p:txBody>
+          <a:bodyPr wrap="square" lIns="0" tIns="0" rIns="0" bIns="0" rtlCol="0" anchor="ctr"/>
+          <a:lstStyle/>
+          <a:p>
+            <a:pPr marL="0" indent="0">
+              <a:lnSpc>
+                <a:spcPts val="1800"/>
+              </a:lnSpc>
+              <a:buNone/>
+            </a:pPr>
+            <a:r>
+              <a:rPr lang="en-US" sz="1300" dirty="0">
+                <a:solidFill>
+                  <a:srgbClr val="5F6478"/>
+                </a:solidFill>
+                <a:latin typeface="Calibri" pitchFamily="34" charset="0"/>
+                <a:ea typeface="Calibri" pitchFamily="34" charset="-122"/>
+                <a:cs typeface="Calibri" pitchFamily="34" charset="-120"/>
+              </a:rPr>
+              <a:t>He lies down to drink and a different thirst begins. He loves a bodiless thing and takes a shadow for a body — and Ovid compares him, lying rapt, to a statue of Parian marble.</a:t>
+            </a:r>
+            <a:endParaRPr lang="en-US" sz="1300" dirty="0"/>
+          </a:p>
+        </p:txBody>
+      </p:sp>
+      <p:sp>
+        <p:nvSpPr>
+          <p:cNvPr id="14" name="Shape 12"/>
+          <p:cNvSpPr/>
+          <p:nvPr/>
+        </p:nvSpPr>
+        <p:spPr>
+          <a:xfrm>
+            <a:off x="640080" y="4946904"/>
+            <a:ext cx="10911535" cy="1042416"/>
+          </a:xfrm>
+          <a:prstGeom prst="roundRect">
+            <a:avLst>
+              <a:gd name="adj" fmla="val 7018"/>
+            </a:avLst>
+          </a:prstGeom>
+          <a:solidFill>
+            <a:srgbClr val="16182B"/>
+          </a:solidFill>
+          <a:ln w="12700">
+            <a:solidFill>
+              <a:srgbClr val="16182B"/>
+            </a:solidFill>
+            <a:prstDash val="solid"/>
+          </a:ln>
+        </p:spPr>
+        <p:txBody>
+          <a:bodyPr/>
+          <a:lstStyle/>
+          <a:p>
+            <a:endParaRPr lang="en-US"/>
+          </a:p>
+        </p:txBody>
+      </p:sp>
+      <p:sp>
+        <p:nvSpPr>
+          <p:cNvPr id="15" name="Text 13"/>
+          <p:cNvSpPr txBox="1"/>
+          <p:nvPr/>
+        </p:nvSpPr>
+        <p:spPr>
+          <a:xfrm>
+            <a:off x="960120" y="4946904"/>
+            <a:ext cx="1691640" cy="1042416"/>
+          </a:xfrm>
+          <a:prstGeom prst="rect">
+            <a:avLst/>
+          </a:prstGeom>
+          <a:noFill/>
+          <a:ln/>
+        </p:spPr>
+        <p:txBody>
+          <a:bodyPr wrap="square" lIns="0" tIns="0" rIns="0" bIns="0" rtlCol="0" anchor="ctr"/>
+          <a:lstStyle/>
+          <a:p>
+            <a:pPr marL="0" indent="0">
+              <a:buNone/>
+            </a:pPr>
+            <a:r>
+              <a:rPr lang="en-US" sz="1700" b="1" dirty="0">
+                <a:solidFill>
+                  <a:srgbClr val="C9A227"/>
+                </a:solidFill>
+                <a:latin typeface="Cambria" pitchFamily="34" charset="0"/>
+                <a:ea typeface="Cambria" pitchFamily="34" charset="-122"/>
+                <a:cs typeface="Cambria" pitchFamily="34" charset="-120"/>
+              </a:rPr>
+              <a:t>The rhyme</a:t>
+            </a:r>
+            <a:endParaRPr lang="en-US" sz="1700" dirty="0"/>
+          </a:p>
+        </p:txBody>
+      </p:sp>
+      <p:sp>
+        <p:nvSpPr>
+          <p:cNvPr id="16" name="Text 14"/>
+          <p:cNvSpPr txBox="1"/>
+          <p:nvPr/>
+        </p:nvSpPr>
+        <p:spPr>
+          <a:xfrm>
+            <a:off x="2788920" y="4946904"/>
+            <a:ext cx="8412480" cy="1042416"/>
+          </a:xfrm>
+          <a:prstGeom prst="rect">
+            <a:avLst/>
+          </a:prstGeom>
+          <a:noFill/>
+          <a:ln/>
+        </p:spPr>
+        <p:txBody>
+          <a:bodyPr wrap="square" lIns="0" tIns="0" rIns="0" bIns="0" rtlCol="0" anchor="ctr"/>
+          <a:lstStyle/>
+          <a:p>
+            <a:pPr marL="0" indent="0">
+              <a:lnSpc>
+                <a:spcPts val="1800"/>
+              </a:lnSpc>
+              <a:buNone/>
+            </a:pPr>
+            <a:r>
+              <a:rPr lang="en-US" sz="1300" dirty="0">
+                <a:solidFill>
+                  <a:srgbClr val="EDE6D6"/>
+                </a:solidFill>
+                <a:latin typeface="Calibri" pitchFamily="34" charset="0"/>
+                <a:ea typeface="Calibri" pitchFamily="34" charset="-122"/>
+                <a:cs typeface="Calibri" pitchFamily="34" charset="-120"/>
+              </a:rPr>
+              <a:t>The lover of the mirror becomes the thing Pygmalion carved. Ovid has now shown us both directions: statue into lover, lover into statue.</a:t>
+            </a:r>
+            <a:endParaRPr lang="en-US" sz="1300" dirty="0"/>
+          </a:p>
+        </p:txBody>
+      </p:sp>
+      <p:sp>
+        <p:nvSpPr>
+          <p:cNvPr id="17" name="Text 15"/>
+          <p:cNvSpPr txBox="1"/>
+          <p:nvPr/>
+        </p:nvSpPr>
+        <p:spPr>
+          <a:xfrm>
+            <a:off x="640080" y="6272784"/>
+            <a:ext cx="10911535" cy="274320"/>
+          </a:xfrm>
+          <a:prstGeom prst="rect">
+            <a:avLst/>
+          </a:prstGeom>
+          <a:noFill/>
+          <a:ln/>
+        </p:spPr>
+        <p:txBody>
+          <a:bodyPr wrap="square" lIns="0" tIns="0" rIns="0" bIns="0" rtlCol="0" anchor="ctr"/>
+          <a:lstStyle/>
+          <a:p>
+            <a:pPr marL="0" indent="0">
+              <a:buNone/>
+            </a:pPr>
+            <a:r>
+              <a:rPr lang="en-US" sz="1000" i="1" dirty="0">
+                <a:solidFill>
+                  <a:srgbClr val="5F6478"/>
+                </a:solidFill>
+                <a:latin typeface="Calibri" pitchFamily="34" charset="0"/>
+                <a:ea typeface="Calibri" pitchFamily="34" charset="-122"/>
+                <a:cs typeface="Calibri" pitchFamily="34" charset="-120"/>
+              </a:rPr>
+              <a:t>Ovid, Metamorphoses Bk III:402–419 (trans. Kline).</a:t>
+            </a:r>
+            <a:endParaRPr lang="en-US" sz="1000" dirty="0"/>
           </a:p>
         </p:txBody>
       </p:sp>
@@ -11706,643 +11460,6 @@
 
 <file path=ppt/slides/slide20.xml><?xml version="1.0" encoding="utf-8"?>
 <p:sld xmlns:a="http://schemas.openxmlformats.org/drawingml/2006/main" xmlns:r="http://schemas.openxmlformats.org/officeDocument/2006/relationships" xmlns:p="http://schemas.openxmlformats.org/presentationml/2006/main">
-  <p:cSld name="Slide 21">
-    <p:bg>
-      <p:bgPr>
-        <a:solidFill>
-          <a:srgbClr val="FFFFFF"/>
-        </a:solidFill>
-        <a:effectLst/>
-      </p:bgPr>
-    </p:bg>
-    <p:spTree>
-      <p:nvGrpSpPr>
-        <p:cNvPr id="1" name=""/>
-        <p:cNvGrpSpPr/>
-        <p:nvPr/>
-      </p:nvGrpSpPr>
-      <p:grpSpPr>
-        <a:xfrm>
-          <a:off x="0" y="0"/>
-          <a:ext cx="0" cy="0"/>
-          <a:chOff x="0" y="0"/>
-          <a:chExt cx="0" cy="0"/>
-        </a:xfrm>
-      </p:grpSpPr>
-      <p:sp>
-        <p:nvSpPr>
-          <p:cNvPr id="2" name="Shape 0"/>
-          <p:cNvSpPr/>
-          <p:nvPr/>
-        </p:nvSpPr>
-        <p:spPr>
-          <a:xfrm>
-            <a:off x="640080" y="429768"/>
-            <a:ext cx="137160" cy="137160"/>
-          </a:xfrm>
-          <a:prstGeom prst="ellipse">
-            <a:avLst/>
-          </a:prstGeom>
-          <a:solidFill>
-            <a:srgbClr val="C9A227"/>
-          </a:solidFill>
-          <a:ln/>
-        </p:spPr>
-        <p:txBody>
-          <a:bodyPr/>
-          <a:lstStyle/>
-          <a:p>
-            <a:endParaRPr lang="en-US"/>
-          </a:p>
-        </p:txBody>
-      </p:sp>
-      <p:sp>
-        <p:nvSpPr>
-          <p:cNvPr id="3" name="Text 1"/>
-          <p:cNvSpPr txBox="1"/>
-          <p:nvPr/>
-        </p:nvSpPr>
-        <p:spPr>
-          <a:xfrm>
-            <a:off x="886968" y="365760"/>
-            <a:ext cx="10058400" cy="274320"/>
-          </a:xfrm>
-          <a:prstGeom prst="rect">
-            <a:avLst/>
-          </a:prstGeom>
-          <a:noFill/>
-          <a:ln/>
-        </p:spPr>
-        <p:txBody>
-          <a:bodyPr wrap="square" lIns="0" tIns="0" rIns="0" bIns="0" rtlCol="0" anchor="ctr"/>
-          <a:lstStyle/>
-          <a:p>
-            <a:pPr marL="0" indent="0">
-              <a:buNone/>
-            </a:pPr>
-            <a:r>
-              <a:rPr lang="en-US" sz="1100" b="1" kern="0" spc="160" dirty="0">
-                <a:solidFill>
-                  <a:srgbClr val="5F6478"/>
-                </a:solidFill>
-                <a:latin typeface="Calibri" pitchFamily="34" charset="0"/>
-                <a:ea typeface="Calibri" pitchFamily="34" charset="-122"/>
-                <a:cs typeface="Calibri" pitchFamily="34" charset="-120"/>
-              </a:rPr>
-              <a:t>BK III:402–436</a:t>
-            </a:r>
-            <a:endParaRPr lang="en-US" sz="1100" dirty="0"/>
-          </a:p>
-        </p:txBody>
-      </p:sp>
-      <p:sp>
-        <p:nvSpPr>
-          <p:cNvPr id="4" name="Text 2"/>
-          <p:cNvSpPr txBox="1"/>
-          <p:nvPr/>
-        </p:nvSpPr>
-        <p:spPr>
-          <a:xfrm>
-            <a:off x="640080" y="713232"/>
-            <a:ext cx="10911535" cy="658368"/>
-          </a:xfrm>
-          <a:prstGeom prst="rect">
-            <a:avLst/>
-          </a:prstGeom>
-          <a:noFill/>
-          <a:ln/>
-        </p:spPr>
-        <p:txBody>
-          <a:bodyPr wrap="square" lIns="0" tIns="0" rIns="0" bIns="0" rtlCol="0" anchor="ctr"/>
-          <a:lstStyle/>
-          <a:p>
-            <a:pPr marL="0" indent="0">
-              <a:buNone/>
-            </a:pPr>
-            <a:r>
-              <a:rPr lang="en-US" sz="3100" b="1" dirty="0">
-                <a:solidFill>
-                  <a:srgbClr val="16182B"/>
-                </a:solidFill>
-                <a:latin typeface="Cambria" pitchFamily="34" charset="0"/>
-                <a:ea typeface="Cambria" pitchFamily="34" charset="-122"/>
-                <a:cs typeface="Cambria" pitchFamily="34" charset="-120"/>
-              </a:rPr>
-              <a:t>The pool is a designed surface</a:t>
-            </a:r>
-            <a:endParaRPr lang="en-US" sz="3100" dirty="0"/>
-          </a:p>
-        </p:txBody>
-      </p:sp>
-      <p:sp>
-        <p:nvSpPr>
-          <p:cNvPr id="5" name="Shape 3"/>
-          <p:cNvSpPr/>
-          <p:nvPr/>
-        </p:nvSpPr>
-        <p:spPr>
-          <a:xfrm>
-            <a:off x="640080" y="1600200"/>
-            <a:ext cx="10911535" cy="1042416"/>
-          </a:xfrm>
-          <a:prstGeom prst="roundRect">
-            <a:avLst>
-              <a:gd name="adj" fmla="val 7018"/>
-            </a:avLst>
-          </a:prstGeom>
-          <a:solidFill>
-            <a:srgbClr val="F6F2E9"/>
-          </a:solidFill>
-          <a:ln w="12700">
-            <a:solidFill>
-              <a:srgbClr val="F6F2E9"/>
-            </a:solidFill>
-            <a:prstDash val="solid"/>
-          </a:ln>
-        </p:spPr>
-        <p:txBody>
-          <a:bodyPr/>
-          <a:lstStyle/>
-          <a:p>
-            <a:endParaRPr lang="en-US"/>
-          </a:p>
-        </p:txBody>
-      </p:sp>
-      <p:sp>
-        <p:nvSpPr>
-          <p:cNvPr id="6" name="Text 4"/>
-          <p:cNvSpPr txBox="1"/>
-          <p:nvPr/>
-        </p:nvSpPr>
-        <p:spPr>
-          <a:xfrm>
-            <a:off x="960120" y="1600200"/>
-            <a:ext cx="1691640" cy="1042416"/>
-          </a:xfrm>
-          <a:prstGeom prst="rect">
-            <a:avLst/>
-          </a:prstGeom>
-          <a:noFill/>
-          <a:ln/>
-        </p:spPr>
-        <p:txBody>
-          <a:bodyPr wrap="square" lIns="0" tIns="0" rIns="0" bIns="0" rtlCol="0" anchor="ctr"/>
-          <a:lstStyle/>
-          <a:p>
-            <a:pPr marL="0" indent="0">
-              <a:buNone/>
-            </a:pPr>
-            <a:r>
-              <a:rPr lang="en-US" sz="1700" b="1" dirty="0">
-                <a:solidFill>
-                  <a:srgbClr val="16182B"/>
-                </a:solidFill>
-                <a:latin typeface="Cambria" pitchFamily="34" charset="0"/>
-                <a:ea typeface="Cambria" pitchFamily="34" charset="-122"/>
-                <a:cs typeface="Cambria" pitchFamily="34" charset="-120"/>
-              </a:rPr>
-              <a:t>The curse</a:t>
-            </a:r>
-            <a:endParaRPr lang="en-US" sz="1700" dirty="0"/>
-          </a:p>
-        </p:txBody>
-      </p:sp>
-      <p:sp>
-        <p:nvSpPr>
-          <p:cNvPr id="7" name="Text 5"/>
-          <p:cNvSpPr txBox="1"/>
-          <p:nvPr/>
-        </p:nvSpPr>
-        <p:spPr>
-          <a:xfrm>
-            <a:off x="2788920" y="1600200"/>
-            <a:ext cx="8412480" cy="1042416"/>
-          </a:xfrm>
-          <a:prstGeom prst="rect">
-            <a:avLst/>
-          </a:prstGeom>
-          <a:noFill/>
-          <a:ln/>
-        </p:spPr>
-        <p:txBody>
-          <a:bodyPr wrap="square" lIns="0" tIns="0" rIns="0" bIns="0" rtlCol="0" anchor="ctr"/>
-          <a:lstStyle/>
-          <a:p>
-            <a:pPr marL="0" indent="0">
-              <a:lnSpc>
-                <a:spcPts val="1800"/>
-              </a:lnSpc>
-              <a:buNone/>
-            </a:pPr>
-            <a:r>
-              <a:rPr lang="en-US" sz="1300" dirty="0">
-                <a:solidFill>
-                  <a:srgbClr val="5F6478"/>
-                </a:solidFill>
-                <a:latin typeface="Calibri" pitchFamily="34" charset="0"/>
-                <a:ea typeface="Calibri" pitchFamily="34" charset="-122"/>
-                <a:cs typeface="Calibri" pitchFamily="34" charset="-120"/>
-              </a:rPr>
-              <a:t>A rejected suitor prays that Narcissus may love and never obtain what he loves. Nemesis grants it. The punishment is precisely reciprocal to what he did to Echo.</a:t>
-            </a:r>
-            <a:endParaRPr lang="en-US" sz="1300" dirty="0"/>
-          </a:p>
-        </p:txBody>
-      </p:sp>
-      <p:sp>
-        <p:nvSpPr>
-          <p:cNvPr id="8" name="Shape 6"/>
-          <p:cNvSpPr/>
-          <p:nvPr/>
-        </p:nvSpPr>
-        <p:spPr>
-          <a:xfrm>
-            <a:off x="640080" y="2715768"/>
-            <a:ext cx="10911535" cy="1042416"/>
-          </a:xfrm>
-          <a:prstGeom prst="roundRect">
-            <a:avLst>
-              <a:gd name="adj" fmla="val 7018"/>
-            </a:avLst>
-          </a:prstGeom>
-          <a:solidFill>
-            <a:srgbClr val="E7F0F2"/>
-          </a:solidFill>
-          <a:ln w="12700">
-            <a:solidFill>
-              <a:srgbClr val="E7F0F2"/>
-            </a:solidFill>
-            <a:prstDash val="solid"/>
-          </a:ln>
-        </p:spPr>
-        <p:txBody>
-          <a:bodyPr/>
-          <a:lstStyle/>
-          <a:p>
-            <a:endParaRPr lang="en-US"/>
-          </a:p>
-        </p:txBody>
-      </p:sp>
-      <p:sp>
-        <p:nvSpPr>
-          <p:cNvPr id="9" name="Text 7"/>
-          <p:cNvSpPr txBox="1"/>
-          <p:nvPr/>
-        </p:nvSpPr>
-        <p:spPr>
-          <a:xfrm>
-            <a:off x="960120" y="2715768"/>
-            <a:ext cx="1691640" cy="1042416"/>
-          </a:xfrm>
-          <a:prstGeom prst="rect">
-            <a:avLst/>
-          </a:prstGeom>
-          <a:noFill/>
-          <a:ln/>
-        </p:spPr>
-        <p:txBody>
-          <a:bodyPr wrap="square" lIns="0" tIns="0" rIns="0" bIns="0" rtlCol="0" anchor="ctr"/>
-          <a:lstStyle/>
-          <a:p>
-            <a:pPr marL="0" indent="0">
-              <a:buNone/>
-            </a:pPr>
-            <a:r>
-              <a:rPr lang="en-US" sz="1700" b="1" dirty="0">
-                <a:solidFill>
-                  <a:srgbClr val="16182B"/>
-                </a:solidFill>
-                <a:latin typeface="Cambria" pitchFamily="34" charset="0"/>
-                <a:ea typeface="Cambria" pitchFamily="34" charset="-122"/>
-                <a:cs typeface="Cambria" pitchFamily="34" charset="-120"/>
-              </a:rPr>
-              <a:t>The surface</a:t>
-            </a:r>
-            <a:endParaRPr lang="en-US" sz="1700" dirty="0"/>
-          </a:p>
-        </p:txBody>
-      </p:sp>
-      <p:sp>
-        <p:nvSpPr>
-          <p:cNvPr id="10" name="Text 8"/>
-          <p:cNvSpPr txBox="1"/>
-          <p:nvPr/>
-        </p:nvSpPr>
-        <p:spPr>
-          <a:xfrm>
-            <a:off x="2788920" y="2715768"/>
-            <a:ext cx="8412480" cy="1042416"/>
-          </a:xfrm>
-          <a:prstGeom prst="rect">
-            <a:avLst/>
-          </a:prstGeom>
-          <a:noFill/>
-          <a:ln/>
-        </p:spPr>
-        <p:txBody>
-          <a:bodyPr wrap="square" lIns="0" tIns="0" rIns="0" bIns="0" rtlCol="0" anchor="ctr"/>
-          <a:lstStyle/>
-          <a:p>
-            <a:pPr marL="0" indent="0">
-              <a:lnSpc>
-                <a:spcPts val="1800"/>
-              </a:lnSpc>
-              <a:buNone/>
-            </a:pPr>
-            <a:r>
-              <a:rPr lang="en-US" sz="1300" dirty="0">
-                <a:solidFill>
-                  <a:srgbClr val="5F6478"/>
-                </a:solidFill>
-                <a:latin typeface="Calibri" pitchFamily="34" charset="0"/>
-                <a:ea typeface="Calibri" pitchFamily="34" charset="-122"/>
-                <a:cs typeface="Calibri" pitchFamily="34" charset="-120"/>
-              </a:rPr>
-              <a:t>Ovid describes a spring no shepherd, goat, animal or bird has touched, unclouded, silver-bright, not even disturbed by a fallen branch. He spends real lines on how undisturbed it is.</a:t>
-            </a:r>
-            <a:endParaRPr lang="en-US" sz="1300" dirty="0"/>
-          </a:p>
-        </p:txBody>
-      </p:sp>
-      <p:sp>
-        <p:nvSpPr>
-          <p:cNvPr id="11" name="Shape 9"/>
-          <p:cNvSpPr/>
-          <p:nvPr/>
-        </p:nvSpPr>
-        <p:spPr>
-          <a:xfrm>
-            <a:off x="640080" y="3831336"/>
-            <a:ext cx="10911535" cy="1042416"/>
-          </a:xfrm>
-          <a:prstGeom prst="roundRect">
-            <a:avLst>
-              <a:gd name="adj" fmla="val 7018"/>
-            </a:avLst>
-          </a:prstGeom>
-          <a:solidFill>
-            <a:srgbClr val="F6F2E9"/>
-          </a:solidFill>
-          <a:ln w="12700">
-            <a:solidFill>
-              <a:srgbClr val="F6F2E9"/>
-            </a:solidFill>
-            <a:prstDash val="solid"/>
-          </a:ln>
-        </p:spPr>
-        <p:txBody>
-          <a:bodyPr/>
-          <a:lstStyle/>
-          <a:p>
-            <a:endParaRPr lang="en-US"/>
-          </a:p>
-        </p:txBody>
-      </p:sp>
-      <p:sp>
-        <p:nvSpPr>
-          <p:cNvPr id="12" name="Text 10"/>
-          <p:cNvSpPr txBox="1"/>
-          <p:nvPr/>
-        </p:nvSpPr>
-        <p:spPr>
-          <a:xfrm>
-            <a:off x="960120" y="3831336"/>
-            <a:ext cx="1691640" cy="1042416"/>
-          </a:xfrm>
-          <a:prstGeom prst="rect">
-            <a:avLst/>
-          </a:prstGeom>
-          <a:noFill/>
-          <a:ln/>
-        </p:spPr>
-        <p:txBody>
-          <a:bodyPr wrap="square" lIns="0" tIns="0" rIns="0" bIns="0" rtlCol="0" anchor="ctr"/>
-          <a:lstStyle/>
-          <a:p>
-            <a:pPr marL="0" indent="0">
-              <a:buNone/>
-            </a:pPr>
-            <a:r>
-              <a:rPr lang="en-US" sz="1700" b="1" dirty="0">
-                <a:solidFill>
-                  <a:srgbClr val="16182B"/>
-                </a:solidFill>
-                <a:latin typeface="Cambria" pitchFamily="34" charset="0"/>
-                <a:ea typeface="Cambria" pitchFamily="34" charset="-122"/>
-                <a:cs typeface="Cambria" pitchFamily="34" charset="-120"/>
-              </a:rPr>
-              <a:t>The mistake</a:t>
-            </a:r>
-            <a:endParaRPr lang="en-US" sz="1700" dirty="0"/>
-          </a:p>
-        </p:txBody>
-      </p:sp>
-      <p:sp>
-        <p:nvSpPr>
-          <p:cNvPr id="13" name="Text 11"/>
-          <p:cNvSpPr txBox="1"/>
-          <p:nvPr/>
-        </p:nvSpPr>
-        <p:spPr>
-          <a:xfrm>
-            <a:off x="2788920" y="3831336"/>
-            <a:ext cx="8412480" cy="1042416"/>
-          </a:xfrm>
-          <a:prstGeom prst="rect">
-            <a:avLst/>
-          </a:prstGeom>
-          <a:noFill/>
-          <a:ln/>
-        </p:spPr>
-        <p:txBody>
-          <a:bodyPr wrap="square" lIns="0" tIns="0" rIns="0" bIns="0" rtlCol="0" anchor="ctr"/>
-          <a:lstStyle/>
-          <a:p>
-            <a:pPr marL="0" indent="0">
-              <a:lnSpc>
-                <a:spcPts val="1800"/>
-              </a:lnSpc>
-              <a:buNone/>
-            </a:pPr>
-            <a:r>
-              <a:rPr lang="en-US" sz="1300" dirty="0">
-                <a:solidFill>
-                  <a:srgbClr val="5F6478"/>
-                </a:solidFill>
-                <a:latin typeface="Calibri" pitchFamily="34" charset="0"/>
-                <a:ea typeface="Calibri" pitchFamily="34" charset="-122"/>
-                <a:cs typeface="Calibri" pitchFamily="34" charset="-120"/>
-              </a:rPr>
-              <a:t>He lies down to drink and a different thirst begins. He loves a bodiless thing and takes a shadow for a body — and Ovid compares him, lying rapt, to a statue of Parian marble.</a:t>
-            </a:r>
-            <a:endParaRPr lang="en-US" sz="1300" dirty="0"/>
-          </a:p>
-        </p:txBody>
-      </p:sp>
-      <p:sp>
-        <p:nvSpPr>
-          <p:cNvPr id="14" name="Shape 12"/>
-          <p:cNvSpPr/>
-          <p:nvPr/>
-        </p:nvSpPr>
-        <p:spPr>
-          <a:xfrm>
-            <a:off x="640080" y="4946904"/>
-            <a:ext cx="10911535" cy="1042416"/>
-          </a:xfrm>
-          <a:prstGeom prst="roundRect">
-            <a:avLst>
-              <a:gd name="adj" fmla="val 7018"/>
-            </a:avLst>
-          </a:prstGeom>
-          <a:solidFill>
-            <a:srgbClr val="16182B"/>
-          </a:solidFill>
-          <a:ln w="12700">
-            <a:solidFill>
-              <a:srgbClr val="16182B"/>
-            </a:solidFill>
-            <a:prstDash val="solid"/>
-          </a:ln>
-        </p:spPr>
-        <p:txBody>
-          <a:bodyPr/>
-          <a:lstStyle/>
-          <a:p>
-            <a:endParaRPr lang="en-US"/>
-          </a:p>
-        </p:txBody>
-      </p:sp>
-      <p:sp>
-        <p:nvSpPr>
-          <p:cNvPr id="15" name="Text 13"/>
-          <p:cNvSpPr txBox="1"/>
-          <p:nvPr/>
-        </p:nvSpPr>
-        <p:spPr>
-          <a:xfrm>
-            <a:off x="960120" y="4946904"/>
-            <a:ext cx="1691640" cy="1042416"/>
-          </a:xfrm>
-          <a:prstGeom prst="rect">
-            <a:avLst/>
-          </a:prstGeom>
-          <a:noFill/>
-          <a:ln/>
-        </p:spPr>
-        <p:txBody>
-          <a:bodyPr wrap="square" lIns="0" tIns="0" rIns="0" bIns="0" rtlCol="0" anchor="ctr"/>
-          <a:lstStyle/>
-          <a:p>
-            <a:pPr marL="0" indent="0">
-              <a:buNone/>
-            </a:pPr>
-            <a:r>
-              <a:rPr lang="en-US" sz="1700" b="1" dirty="0">
-                <a:solidFill>
-                  <a:srgbClr val="C9A227"/>
-                </a:solidFill>
-                <a:latin typeface="Cambria" pitchFamily="34" charset="0"/>
-                <a:ea typeface="Cambria" pitchFamily="34" charset="-122"/>
-                <a:cs typeface="Cambria" pitchFamily="34" charset="-120"/>
-              </a:rPr>
-              <a:t>The rhyme</a:t>
-            </a:r>
-            <a:endParaRPr lang="en-US" sz="1700" dirty="0"/>
-          </a:p>
-        </p:txBody>
-      </p:sp>
-      <p:sp>
-        <p:nvSpPr>
-          <p:cNvPr id="16" name="Text 14"/>
-          <p:cNvSpPr txBox="1"/>
-          <p:nvPr/>
-        </p:nvSpPr>
-        <p:spPr>
-          <a:xfrm>
-            <a:off x="2788920" y="4946904"/>
-            <a:ext cx="8412480" cy="1042416"/>
-          </a:xfrm>
-          <a:prstGeom prst="rect">
-            <a:avLst/>
-          </a:prstGeom>
-          <a:noFill/>
-          <a:ln/>
-        </p:spPr>
-        <p:txBody>
-          <a:bodyPr wrap="square" lIns="0" tIns="0" rIns="0" bIns="0" rtlCol="0" anchor="ctr"/>
-          <a:lstStyle/>
-          <a:p>
-            <a:pPr marL="0" indent="0">
-              <a:lnSpc>
-                <a:spcPts val="1800"/>
-              </a:lnSpc>
-              <a:buNone/>
-            </a:pPr>
-            <a:r>
-              <a:rPr lang="en-US" sz="1300" dirty="0">
-                <a:solidFill>
-                  <a:srgbClr val="EDE6D6"/>
-                </a:solidFill>
-                <a:latin typeface="Calibri" pitchFamily="34" charset="0"/>
-                <a:ea typeface="Calibri" pitchFamily="34" charset="-122"/>
-                <a:cs typeface="Calibri" pitchFamily="34" charset="-120"/>
-              </a:rPr>
-              <a:t>The lover of the mirror becomes the thing Pygmalion carved. Ovid has now shown us both directions: statue into lover, lover into statue.</a:t>
-            </a:r>
-            <a:endParaRPr lang="en-US" sz="1300" dirty="0"/>
-          </a:p>
-        </p:txBody>
-      </p:sp>
-      <p:sp>
-        <p:nvSpPr>
-          <p:cNvPr id="17" name="Text 15"/>
-          <p:cNvSpPr txBox="1"/>
-          <p:nvPr/>
-        </p:nvSpPr>
-        <p:spPr>
-          <a:xfrm>
-            <a:off x="640080" y="6272784"/>
-            <a:ext cx="10911535" cy="274320"/>
-          </a:xfrm>
-          <a:prstGeom prst="rect">
-            <a:avLst/>
-          </a:prstGeom>
-          <a:noFill/>
-          <a:ln/>
-        </p:spPr>
-        <p:txBody>
-          <a:bodyPr wrap="square" lIns="0" tIns="0" rIns="0" bIns="0" rtlCol="0" anchor="ctr"/>
-          <a:lstStyle/>
-          <a:p>
-            <a:pPr marL="0" indent="0">
-              <a:buNone/>
-            </a:pPr>
-            <a:r>
-              <a:rPr lang="en-US" sz="1000" i="1" dirty="0">
-                <a:solidFill>
-                  <a:srgbClr val="5F6478"/>
-                </a:solidFill>
-                <a:latin typeface="Calibri" pitchFamily="34" charset="0"/>
-                <a:ea typeface="Calibri" pitchFamily="34" charset="-122"/>
-                <a:cs typeface="Calibri" pitchFamily="34" charset="-120"/>
-              </a:rPr>
-              <a:t>Ovid, Metamorphoses Bk III:402–419 (trans. Kline).</a:t>
-            </a:r>
-            <a:endParaRPr lang="en-US" sz="1000" dirty="0"/>
-          </a:p>
-        </p:txBody>
-      </p:sp>
-    </p:spTree>
-  </p:cSld>
-  <p:clrMapOvr>
-    <a:masterClrMapping/>
-  </p:clrMapOvr>
-</p:sld>
-</file>
-
-<file path=ppt/slides/slide21.xml><?xml version="1.0" encoding="utf-8"?>
-<p:sld xmlns:a="http://schemas.openxmlformats.org/drawingml/2006/main" xmlns:r="http://schemas.openxmlformats.org/officeDocument/2006/relationships" xmlns:p="http://schemas.openxmlformats.org/presentationml/2006/main">
   <p:cSld name="Slide 22">
     <p:bg>
       <p:bgPr>
@@ -12863,7 +11980,7 @@
 </p:sld>
 </file>
 
-<file path=ppt/slides/slide22.xml><?xml version="1.0" encoding="utf-8"?>
+<file path=ppt/slides/slide21.xml><?xml version="1.0" encoding="utf-8"?>
 <p:sld xmlns:a="http://schemas.openxmlformats.org/drawingml/2006/main" xmlns:r="http://schemas.openxmlformats.org/officeDocument/2006/relationships" xmlns:p="http://schemas.openxmlformats.org/presentationml/2006/main">
   <p:cSld name="Slide 23">
     <p:bg>
@@ -13458,7 +12575,7 @@
 </p:sld>
 </file>
 
-<file path=ppt/slides/slide23.xml><?xml version="1.0" encoding="utf-8"?>
+<file path=ppt/slides/slide22.xml><?xml version="1.0" encoding="utf-8"?>
 <p:sld xmlns:a="http://schemas.openxmlformats.org/drawingml/2006/main" xmlns:r="http://schemas.openxmlformats.org/officeDocument/2006/relationships" xmlns:p="http://schemas.openxmlformats.org/presentationml/2006/main">
   <p:cSld name="Slide 24">
     <p:bg>
@@ -14359,7 +13476,7 @@
 </p:sld>
 </file>
 
-<file path=ppt/slides/slide24.xml><?xml version="1.0" encoding="utf-8"?>
+<file path=ppt/slides/slide23.xml><?xml version="1.0" encoding="utf-8"?>
 <p:sld xmlns:a="http://schemas.openxmlformats.org/drawingml/2006/main" xmlns:r="http://schemas.openxmlformats.org/officeDocument/2006/relationships" xmlns:p="http://schemas.openxmlformats.org/presentationml/2006/main">
   <p:cSld name="Slide 25">
     <p:bg>
@@ -15044,7 +14161,7 @@
 </p:sld>
 </file>
 
-<file path=ppt/slides/slide25.xml><?xml version="1.0" encoding="utf-8"?>
+<file path=ppt/slides/slide24.xml><?xml version="1.0" encoding="utf-8"?>
 <p:sld xmlns:a="http://schemas.openxmlformats.org/drawingml/2006/main" xmlns:r="http://schemas.openxmlformats.org/officeDocument/2006/relationships" xmlns:p="http://schemas.openxmlformats.org/presentationml/2006/main">
   <p:cSld name="Slide 26">
     <p:bg>
@@ -15979,7 +15096,7 @@
 </p:sld>
 </file>
 
-<file path=ppt/slides/slide26.xml><?xml version="1.0" encoding="utf-8"?>
+<file path=ppt/slides/slide25.xml><?xml version="1.0" encoding="utf-8"?>
 <p:sld xmlns:a="http://schemas.openxmlformats.org/drawingml/2006/main" xmlns:r="http://schemas.openxmlformats.org/officeDocument/2006/relationships" xmlns:p="http://schemas.openxmlformats.org/presentationml/2006/main">
   <p:cSld name="Slide 27">
     <p:bg>
@@ -16733,7 +15850,7 @@
 </p:sld>
 </file>
 
-<file path=ppt/slides/slide27.xml><?xml version="1.0" encoding="utf-8"?>
+<file path=ppt/slides/slide26.xml><?xml version="1.0" encoding="utf-8"?>
 <p:sld xmlns:a="http://schemas.openxmlformats.org/drawingml/2006/main" xmlns:r="http://schemas.openxmlformats.org/officeDocument/2006/relationships" xmlns:p="http://schemas.openxmlformats.org/presentationml/2006/main">
   <p:cSld name="Slide 28">
     <p:bg>
@@ -17993,288 +17110,6 @@
 
 <file path=ppt/slides/slide4.xml><?xml version="1.0" encoding="utf-8"?>
 <p:sld xmlns:a="http://schemas.openxmlformats.org/drawingml/2006/main" xmlns:r="http://schemas.openxmlformats.org/officeDocument/2006/relationships" xmlns:p="http://schemas.openxmlformats.org/presentationml/2006/main">
-  <p:cSld name="Slide 5">
-    <p:bg>
-      <p:bgPr>
-        <a:solidFill>
-          <a:srgbClr val="16182B"/>
-        </a:solidFill>
-        <a:effectLst/>
-      </p:bgPr>
-    </p:bg>
-    <p:spTree>
-      <p:nvGrpSpPr>
-        <p:cNvPr id="1" name=""/>
-        <p:cNvGrpSpPr/>
-        <p:nvPr/>
-      </p:nvGrpSpPr>
-      <p:grpSpPr>
-        <a:xfrm>
-          <a:off x="0" y="0"/>
-          <a:ext cx="0" cy="0"/>
-          <a:chOff x="0" y="0"/>
-          <a:chExt cx="0" cy="0"/>
-        </a:xfrm>
-      </p:grpSpPr>
-      <p:sp>
-        <p:nvSpPr>
-          <p:cNvPr id="2" name="Shape 0"/>
-          <p:cNvSpPr/>
-          <p:nvPr/>
-        </p:nvSpPr>
-        <p:spPr>
-          <a:xfrm>
-            <a:off x="640080" y="502920"/>
-            <a:ext cx="137160" cy="137160"/>
-          </a:xfrm>
-          <a:prstGeom prst="ellipse">
-            <a:avLst/>
-          </a:prstGeom>
-          <a:solidFill>
-            <a:srgbClr val="C9A227"/>
-          </a:solidFill>
-          <a:ln/>
-        </p:spPr>
-        <p:txBody>
-          <a:bodyPr/>
-          <a:lstStyle/>
-          <a:p>
-            <a:endParaRPr lang="en-US"/>
-          </a:p>
-        </p:txBody>
-      </p:sp>
-      <p:sp>
-        <p:nvSpPr>
-          <p:cNvPr id="3" name="Text 1"/>
-          <p:cNvSpPr txBox="1"/>
-          <p:nvPr/>
-        </p:nvSpPr>
-        <p:spPr>
-          <a:xfrm>
-            <a:off x="886968" y="438912"/>
-            <a:ext cx="9144000" cy="274320"/>
-          </a:xfrm>
-          <a:prstGeom prst="rect">
-            <a:avLst/>
-          </a:prstGeom>
-          <a:noFill/>
-          <a:ln/>
-        </p:spPr>
-        <p:txBody>
-          <a:bodyPr wrap="square" lIns="0" tIns="0" rIns="0" bIns="0" rtlCol="0" anchor="ctr"/>
-          <a:lstStyle/>
-          <a:p>
-            <a:pPr marL="0" indent="0">
-              <a:buNone/>
-            </a:pPr>
-            <a:r>
-              <a:rPr lang="en-US" sz="1100" b="1" kern="0" spc="160" dirty="0">
-                <a:solidFill>
-                  <a:srgbClr val="C9A227"/>
-                </a:solidFill>
-                <a:latin typeface="Calibri" pitchFamily="34" charset="0"/>
-                <a:ea typeface="Calibri" pitchFamily="34" charset="-122"/>
-                <a:cs typeface="Calibri" pitchFamily="34" charset="-120"/>
-              </a:rPr>
-              <a:t>WARM-UP · THREE MINUTES · NO TALKING</a:t>
-            </a:r>
-            <a:endParaRPr lang="en-US" sz="1100" dirty="0"/>
-          </a:p>
-        </p:txBody>
-      </p:sp>
-      <p:sp>
-        <p:nvSpPr>
-          <p:cNvPr id="4" name="Text 2"/>
-          <p:cNvSpPr txBox="1"/>
-          <p:nvPr/>
-        </p:nvSpPr>
-        <p:spPr>
-          <a:xfrm>
-            <a:off x="640080" y="868680"/>
-            <a:ext cx="10881360" cy="640080"/>
-          </a:xfrm>
-          <a:prstGeom prst="rect">
-            <a:avLst/>
-          </a:prstGeom>
-          <a:noFill/>
-          <a:ln/>
-        </p:spPr>
-        <p:txBody>
-          <a:bodyPr wrap="square" lIns="0" tIns="0" rIns="0" bIns="0" rtlCol="0" anchor="ctr"/>
-          <a:lstStyle/>
-          <a:p>
-            <a:pPr marL="0" indent="0">
-              <a:buNone/>
-            </a:pPr>
-            <a:r>
-              <a:rPr lang="en-US" sz="3400" b="1" dirty="0">
-                <a:solidFill>
-                  <a:srgbClr val="EDE6D6"/>
-                </a:solidFill>
-                <a:latin typeface="Cambria" pitchFamily="34" charset="0"/>
-                <a:ea typeface="Cambria" pitchFamily="34" charset="-122"/>
-                <a:cs typeface="Cambria" pitchFamily="34" charset="-120"/>
-              </a:rPr>
-              <a:t>Write, don’t discuss</a:t>
-            </a:r>
-            <a:endParaRPr lang="en-US" sz="3400" dirty="0"/>
-          </a:p>
-        </p:txBody>
-      </p:sp>
-      <p:sp>
-        <p:nvSpPr>
-          <p:cNvPr id="5" name="Shape 3"/>
-          <p:cNvSpPr/>
-          <p:nvPr/>
-        </p:nvSpPr>
-        <p:spPr>
-          <a:xfrm>
-            <a:off x="640080" y="1783080"/>
-            <a:ext cx="10911535" cy="2880360"/>
-          </a:xfrm>
-          <a:prstGeom prst="roundRect">
-            <a:avLst>
-              <a:gd name="adj" fmla="val 2540"/>
-            </a:avLst>
-          </a:prstGeom>
-          <a:solidFill>
-            <a:srgbClr val="242742"/>
-          </a:solidFill>
-          <a:ln w="12700">
-            <a:solidFill>
-              <a:srgbClr val="242742"/>
-            </a:solidFill>
-            <a:prstDash val="solid"/>
-          </a:ln>
-        </p:spPr>
-        <p:txBody>
-          <a:bodyPr/>
-          <a:lstStyle/>
-          <a:p>
-            <a:endParaRPr lang="en-US"/>
-          </a:p>
-        </p:txBody>
-      </p:sp>
-      <p:sp>
-        <p:nvSpPr>
-          <p:cNvPr id="6" name="Text 4"/>
-          <p:cNvSpPr txBox="1"/>
-          <p:nvPr/>
-        </p:nvSpPr>
-        <p:spPr>
-          <a:xfrm>
-            <a:off x="1097280" y="2148840"/>
-            <a:ext cx="10058400" cy="2194560"/>
-          </a:xfrm>
-          <a:prstGeom prst="rect">
-            <a:avLst/>
-          </a:prstGeom>
-          <a:noFill/>
-          <a:ln/>
-        </p:spPr>
-        <p:txBody>
-          <a:bodyPr wrap="square" lIns="0" tIns="0" rIns="0" bIns="0" rtlCol="0" anchor="ctr"/>
-          <a:lstStyle/>
-          <a:p>
-            <a:pPr marL="0" indent="0">
-              <a:lnSpc>
-                <a:spcPts val="3400"/>
-              </a:lnSpc>
-              <a:buNone/>
-            </a:pPr>
-            <a:r>
-              <a:rPr lang="en-US" sz="2200" dirty="0">
-                <a:solidFill>
-                  <a:srgbClr val="FFFFFF"/>
-                </a:solidFill>
-                <a:latin typeface="Cambria" pitchFamily="34" charset="0"/>
-                <a:ea typeface="Cambria" pitchFamily="34" charset="-122"/>
-                <a:cs typeface="Cambria" pitchFamily="34" charset="-120"/>
-              </a:rPr>
-              <a:t>Describe something you have made, tuned, trained or configured — a playlist, a prompt, a game character, a bot, a model — that started to feel as though it had a personality.</a:t>
-            </a:r>
-            <a:endParaRPr lang="en-US" sz="2200" dirty="0"/>
-          </a:p>
-          <a:p>
-            <a:pPr marL="0" indent="0">
-              <a:lnSpc>
-                <a:spcPts val="3400"/>
-              </a:lnSpc>
-              <a:buNone/>
-            </a:pPr>
-            <a:endParaRPr lang="en-US" sz="2200" dirty="0"/>
-          </a:p>
-          <a:p>
-            <a:pPr marL="0" indent="0">
-              <a:lnSpc>
-                <a:spcPts val="3400"/>
-              </a:lnSpc>
-              <a:buNone/>
-            </a:pPr>
-            <a:r>
-              <a:rPr lang="en-US" sz="2200" dirty="0">
-                <a:solidFill>
-                  <a:srgbClr val="FFFFFF"/>
-                </a:solidFill>
-                <a:latin typeface="Cambria" pitchFamily="34" charset="0"/>
-                <a:ea typeface="Cambria" pitchFamily="34" charset="-122"/>
-                <a:cs typeface="Cambria" pitchFamily="34" charset="-120"/>
-              </a:rPr>
-              <a:t>What did you do to keep that feeling going? What would have broken it?</a:t>
-            </a:r>
-            <a:endParaRPr lang="en-US" sz="2200" dirty="0"/>
-          </a:p>
-        </p:txBody>
-      </p:sp>
-      <p:sp>
-        <p:nvSpPr>
-          <p:cNvPr id="7" name="Text 5"/>
-          <p:cNvSpPr txBox="1"/>
-          <p:nvPr/>
-        </p:nvSpPr>
-        <p:spPr>
-          <a:xfrm>
-            <a:off x="640080" y="4956048"/>
-            <a:ext cx="10881360" cy="457200"/>
-          </a:xfrm>
-          <a:prstGeom prst="rect">
-            <a:avLst/>
-          </a:prstGeom>
-          <a:noFill/>
-          <a:ln/>
-        </p:spPr>
-        <p:txBody>
-          <a:bodyPr wrap="square" lIns="0" tIns="0" rIns="0" bIns="0" rtlCol="0" anchor="ctr"/>
-          <a:lstStyle/>
-          <a:p>
-            <a:pPr marL="0" indent="0">
-              <a:buNone/>
-            </a:pPr>
-            <a:r>
-              <a:rPr lang="en-US" sz="1450" i="1" dirty="0">
-                <a:solidFill>
-                  <a:srgbClr val="86C2CF"/>
-                </a:solidFill>
-                <a:latin typeface="Calibri" pitchFamily="34" charset="0"/>
-                <a:ea typeface="Calibri" pitchFamily="34" charset="-122"/>
-                <a:cs typeface="Calibri" pitchFamily="34" charset="-120"/>
-              </a:rPr>
-              <a:t>Keep the page. We come back to it at 1:15, and you will be asked which of three ancient stances you were taking.</a:t>
-            </a:r>
-            <a:endParaRPr lang="en-US" sz="1450" dirty="0"/>
-          </a:p>
-        </p:txBody>
-      </p:sp>
-    </p:spTree>
-  </p:cSld>
-  <p:clrMapOvr>
-    <a:masterClrMapping/>
-  </p:clrMapOvr>
-</p:sld>
-</file>
-
-<file path=ppt/slides/slide5.xml><?xml version="1.0" encoding="utf-8"?>
-<p:sld xmlns:a="http://schemas.openxmlformats.org/drawingml/2006/main" xmlns:r="http://schemas.openxmlformats.org/officeDocument/2006/relationships" xmlns:p="http://schemas.openxmlformats.org/presentationml/2006/main">
   <p:cSld name="Slide 6">
     <p:bg>
       <p:bgPr>
@@ -18518,7 +17353,7 @@
 </p:sld>
 </file>
 
-<file path=ppt/slides/slide6.xml><?xml version="1.0" encoding="utf-8"?>
+<file path=ppt/slides/slide5.xml><?xml version="1.0" encoding="utf-8"?>
 <p:sld xmlns:a="http://schemas.openxmlformats.org/drawingml/2006/main" xmlns:r="http://schemas.openxmlformats.org/officeDocument/2006/relationships" xmlns:p="http://schemas.openxmlformats.org/presentationml/2006/main">
   <p:cSld name="Slide 7">
     <p:bg>
@@ -19116,7 +17951,7 @@
 </p:sld>
 </file>
 
-<file path=ppt/slides/slide7.xml><?xml version="1.0" encoding="utf-8"?>
+<file path=ppt/slides/slide6.xml><?xml version="1.0" encoding="utf-8"?>
 <p:sld xmlns:a="http://schemas.openxmlformats.org/drawingml/2006/main" xmlns:r="http://schemas.openxmlformats.org/officeDocument/2006/relationships" xmlns:p="http://schemas.openxmlformats.org/presentationml/2006/main">
   <p:cSld name="Slide 8">
     <p:bg>
@@ -20093,7 +18928,7 @@
 </p:sld>
 </file>
 
-<file path=ppt/slides/slide8.xml><?xml version="1.0" encoding="utf-8"?>
+<file path=ppt/slides/slide7.xml><?xml version="1.0" encoding="utf-8"?>
 <p:sld xmlns:a="http://schemas.openxmlformats.org/drawingml/2006/main" xmlns:r="http://schemas.openxmlformats.org/officeDocument/2006/relationships" xmlns:p="http://schemas.openxmlformats.org/presentationml/2006/main">
   <p:cSld name="Slide 9">
     <p:bg>
@@ -20838,7 +19673,7 @@
 </p:sld>
 </file>
 
-<file path=ppt/slides/slide9.xml><?xml version="1.0" encoding="utf-8"?>
+<file path=ppt/slides/slide8.xml><?xml version="1.0" encoding="utf-8"?>
 <p:sld xmlns:a="http://schemas.openxmlformats.org/drawingml/2006/main" xmlns:r="http://schemas.openxmlformats.org/officeDocument/2006/relationships" xmlns:p="http://schemas.openxmlformats.org/presentationml/2006/main">
   <p:cSld name="Slide 10">
     <p:bg>
@@ -21375,6 +20210,816 @@
                 <a:cs typeface="Calibri" pitchFamily="34" charset="-120"/>
               </a:rPr>
               <a:t>Ovid, Metamorphoses Bk X:270–279 (trans. Kline).</a:t>
+            </a:r>
+            <a:endParaRPr lang="en-US" sz="1000" dirty="0"/>
+          </a:p>
+        </p:txBody>
+      </p:sp>
+    </p:spTree>
+  </p:cSld>
+  <p:clrMapOvr>
+    <a:masterClrMapping/>
+  </p:clrMapOvr>
+</p:sld>
+</file>
+
+<file path=ppt/slides/slide9.xml><?xml version="1.0" encoding="utf-8"?>
+<p:sld xmlns:a="http://schemas.openxmlformats.org/drawingml/2006/main" xmlns:r="http://schemas.openxmlformats.org/officeDocument/2006/relationships" xmlns:p="http://schemas.openxmlformats.org/presentationml/2006/main">
+  <p:cSld name="Slide 11">
+    <p:bg>
+      <p:bgPr>
+        <a:solidFill>
+          <a:srgbClr val="FFFFFF"/>
+        </a:solidFill>
+        <a:effectLst/>
+      </p:bgPr>
+    </p:bg>
+    <p:spTree>
+      <p:nvGrpSpPr>
+        <p:cNvPr id="1" name=""/>
+        <p:cNvGrpSpPr/>
+        <p:nvPr/>
+      </p:nvGrpSpPr>
+      <p:grpSpPr>
+        <a:xfrm>
+          <a:off x="0" y="0"/>
+          <a:ext cx="0" cy="0"/>
+          <a:chOff x="0" y="0"/>
+          <a:chExt cx="0" cy="0"/>
+        </a:xfrm>
+      </p:grpSpPr>
+      <p:sp>
+        <p:nvSpPr>
+          <p:cNvPr id="2" name="Shape 0"/>
+          <p:cNvSpPr/>
+          <p:nvPr/>
+        </p:nvSpPr>
+        <p:spPr>
+          <a:xfrm>
+            <a:off x="640080" y="429768"/>
+            <a:ext cx="137160" cy="137160"/>
+          </a:xfrm>
+          <a:prstGeom prst="ellipse">
+            <a:avLst/>
+          </a:prstGeom>
+          <a:solidFill>
+            <a:srgbClr val="C9A227"/>
+          </a:solidFill>
+          <a:ln/>
+        </p:spPr>
+        <p:txBody>
+          <a:bodyPr/>
+          <a:lstStyle/>
+          <a:p>
+            <a:endParaRPr lang="en-US"/>
+          </a:p>
+        </p:txBody>
+      </p:sp>
+      <p:sp>
+        <p:nvSpPr>
+          <p:cNvPr id="3" name="Text 1"/>
+          <p:cNvSpPr txBox="1"/>
+          <p:nvPr/>
+        </p:nvSpPr>
+        <p:spPr>
+          <a:xfrm>
+            <a:off x="886968" y="365760"/>
+            <a:ext cx="10058400" cy="274320"/>
+          </a:xfrm>
+          <a:prstGeom prst="rect">
+            <a:avLst/>
+          </a:prstGeom>
+          <a:noFill/>
+          <a:ln/>
+        </p:spPr>
+        <p:txBody>
+          <a:bodyPr wrap="square" lIns="0" tIns="0" rIns="0" bIns="0" rtlCol="0" anchor="ctr"/>
+          <a:lstStyle/>
+          <a:p>
+            <a:pPr marL="0" indent="0">
+              <a:buNone/>
+            </a:pPr>
+            <a:r>
+              <a:rPr lang="en-US" sz="1100" b="1" kern="0" spc="160" dirty="0">
+                <a:solidFill>
+                  <a:srgbClr val="5F6478"/>
+                </a:solidFill>
+                <a:latin typeface="Calibri" pitchFamily="34" charset="0"/>
+                <a:ea typeface="Calibri" pitchFamily="34" charset="-122"/>
+                <a:cs typeface="Calibri" pitchFamily="34" charset="-120"/>
+              </a:rPr>
+              <a:t>BK X:280–294</a:t>
+            </a:r>
+            <a:endParaRPr lang="en-US" sz="1100" dirty="0"/>
+          </a:p>
+        </p:txBody>
+      </p:sp>
+      <p:sp>
+        <p:nvSpPr>
+          <p:cNvPr id="4" name="Text 2"/>
+          <p:cNvSpPr txBox="1"/>
+          <p:nvPr/>
+        </p:nvSpPr>
+        <p:spPr>
+          <a:xfrm>
+            <a:off x="640080" y="713232"/>
+            <a:ext cx="10911535" cy="658368"/>
+          </a:xfrm>
+          <a:prstGeom prst="rect">
+            <a:avLst/>
+          </a:prstGeom>
+          <a:noFill/>
+          <a:ln/>
+        </p:spPr>
+        <p:txBody>
+          <a:bodyPr wrap="square" lIns="0" tIns="0" rIns="0" bIns="0" rtlCol="0" anchor="ctr"/>
+          <a:lstStyle/>
+          <a:p>
+            <a:pPr marL="0" indent="0">
+              <a:buNone/>
+            </a:pPr>
+            <a:r>
+              <a:rPr lang="en-US" sz="3100" b="1" dirty="0">
+                <a:solidFill>
+                  <a:srgbClr val="16182B"/>
+                </a:solidFill>
+                <a:latin typeface="Cambria" pitchFamily="34" charset="0"/>
+                <a:ea typeface="Cambria" pitchFamily="34" charset="-122"/>
+                <a:cs typeface="Cambria" pitchFamily="34" charset="-120"/>
+              </a:rPr>
+              <a:t>Who actually does the animating?</a:t>
+            </a:r>
+            <a:endParaRPr lang="en-US" sz="3100" dirty="0"/>
+          </a:p>
+        </p:txBody>
+      </p:sp>
+      <p:sp>
+        <p:nvSpPr>
+          <p:cNvPr id="5" name="Shape 3"/>
+          <p:cNvSpPr/>
+          <p:nvPr/>
+        </p:nvSpPr>
+        <p:spPr>
+          <a:xfrm>
+            <a:off x="640080" y="1600200"/>
+            <a:ext cx="6766560" cy="868680"/>
+          </a:xfrm>
+          <a:prstGeom prst="roundRect">
+            <a:avLst>
+              <a:gd name="adj" fmla="val 8421"/>
+            </a:avLst>
+          </a:prstGeom>
+          <a:solidFill>
+            <a:srgbClr val="F6F2E9"/>
+          </a:solidFill>
+          <a:ln w="12700">
+            <a:solidFill>
+              <a:srgbClr val="F6F2E9"/>
+            </a:solidFill>
+            <a:prstDash val="solid"/>
+          </a:ln>
+        </p:spPr>
+        <p:txBody>
+          <a:bodyPr/>
+          <a:lstStyle/>
+          <a:p>
+            <a:endParaRPr lang="en-US"/>
+          </a:p>
+        </p:txBody>
+      </p:sp>
+      <p:sp>
+        <p:nvSpPr>
+          <p:cNvPr id="6" name="Text 4"/>
+          <p:cNvSpPr txBox="1"/>
+          <p:nvPr/>
+        </p:nvSpPr>
+        <p:spPr>
+          <a:xfrm>
+            <a:off x="914400" y="1600200"/>
+            <a:ext cx="1371600" cy="868680"/>
+          </a:xfrm>
+          <a:prstGeom prst="rect">
+            <a:avLst/>
+          </a:prstGeom>
+          <a:noFill/>
+          <a:ln/>
+        </p:spPr>
+        <p:txBody>
+          <a:bodyPr wrap="square" lIns="0" tIns="0" rIns="0" bIns="0" rtlCol="0" anchor="ctr"/>
+          <a:lstStyle/>
+          <a:p>
+            <a:pPr marL="0" indent="0">
+              <a:buNone/>
+            </a:pPr>
+            <a:r>
+              <a:rPr lang="en-US" sz="1600" b="1" dirty="0">
+                <a:solidFill>
+                  <a:srgbClr val="16182B"/>
+                </a:solidFill>
+                <a:latin typeface="Cambria" pitchFamily="34" charset="0"/>
+                <a:ea typeface="Cambria" pitchFamily="34" charset="-122"/>
+                <a:cs typeface="Cambria" pitchFamily="34" charset="-120"/>
+              </a:rPr>
+              <a:t>Warmth</a:t>
+            </a:r>
+            <a:endParaRPr lang="en-US" sz="1600" dirty="0"/>
+          </a:p>
+        </p:txBody>
+      </p:sp>
+      <p:sp>
+        <p:nvSpPr>
+          <p:cNvPr id="7" name="Text 5"/>
+          <p:cNvSpPr txBox="1"/>
+          <p:nvPr/>
+        </p:nvSpPr>
+        <p:spPr>
+          <a:xfrm>
+            <a:off x="2331720" y="1600200"/>
+            <a:ext cx="4892040" cy="868680"/>
+          </a:xfrm>
+          <a:prstGeom prst="rect">
+            <a:avLst/>
+          </a:prstGeom>
+          <a:noFill/>
+          <a:ln/>
+        </p:spPr>
+        <p:txBody>
+          <a:bodyPr wrap="square" lIns="0" tIns="0" rIns="0" bIns="0" rtlCol="0" anchor="ctr"/>
+          <a:lstStyle/>
+          <a:p>
+            <a:pPr marL="0" indent="0">
+              <a:lnSpc>
+                <a:spcPts val="1600"/>
+              </a:lnSpc>
+              <a:buNone/>
+            </a:pPr>
+            <a:r>
+              <a:rPr lang="en-US" sz="1250" dirty="0">
+                <a:solidFill>
+                  <a:srgbClr val="5F6478"/>
+                </a:solidFill>
+                <a:latin typeface="Calibri" pitchFamily="34" charset="0"/>
+                <a:ea typeface="Calibri" pitchFamily="34" charset="-122"/>
+                <a:cs typeface="Calibri" pitchFamily="34" charset="-120"/>
+              </a:rPr>
+              <a:t>He returns home, leans over the couch and kisses the figure. It is warm. He kisses again and touches, and the ivory begins to yield.</a:t>
+            </a:r>
+            <a:endParaRPr lang="en-US" sz="1250" dirty="0"/>
+          </a:p>
+        </p:txBody>
+      </p:sp>
+      <p:sp>
+        <p:nvSpPr>
+          <p:cNvPr id="8" name="Shape 6"/>
+          <p:cNvSpPr/>
+          <p:nvPr/>
+        </p:nvSpPr>
+        <p:spPr>
+          <a:xfrm>
+            <a:off x="640080" y="2569464"/>
+            <a:ext cx="6766560" cy="868680"/>
+          </a:xfrm>
+          <a:prstGeom prst="roundRect">
+            <a:avLst>
+              <a:gd name="adj" fmla="val 8421"/>
+            </a:avLst>
+          </a:prstGeom>
+          <a:solidFill>
+            <a:srgbClr val="E7F0F2"/>
+          </a:solidFill>
+          <a:ln w="12700">
+            <a:solidFill>
+              <a:srgbClr val="E7F0F2"/>
+            </a:solidFill>
+            <a:prstDash val="solid"/>
+          </a:ln>
+        </p:spPr>
+        <p:txBody>
+          <a:bodyPr/>
+          <a:lstStyle/>
+          <a:p>
+            <a:endParaRPr lang="en-US"/>
+          </a:p>
+        </p:txBody>
+      </p:sp>
+      <p:sp>
+        <p:nvSpPr>
+          <p:cNvPr id="9" name="Text 7"/>
+          <p:cNvSpPr txBox="1"/>
+          <p:nvPr/>
+        </p:nvSpPr>
+        <p:spPr>
+          <a:xfrm>
+            <a:off x="914400" y="2569464"/>
+            <a:ext cx="1371600" cy="868680"/>
+          </a:xfrm>
+          <a:prstGeom prst="rect">
+            <a:avLst/>
+          </a:prstGeom>
+          <a:noFill/>
+          <a:ln/>
+        </p:spPr>
+        <p:txBody>
+          <a:bodyPr wrap="square" lIns="0" tIns="0" rIns="0" bIns="0" rtlCol="0" anchor="ctr"/>
+          <a:lstStyle/>
+          <a:p>
+            <a:pPr marL="0" indent="0">
+              <a:buNone/>
+            </a:pPr>
+            <a:r>
+              <a:rPr lang="en-US" sz="1600" b="1" dirty="0">
+                <a:solidFill>
+                  <a:srgbClr val="2E7D8C"/>
+                </a:solidFill>
+                <a:latin typeface="Cambria" pitchFamily="34" charset="0"/>
+                <a:ea typeface="Cambria" pitchFamily="34" charset="-122"/>
+                <a:cs typeface="Cambria" pitchFamily="34" charset="-120"/>
+              </a:rPr>
+              <a:t>The simile</a:t>
+            </a:r>
+            <a:endParaRPr lang="en-US" sz="1600" dirty="0"/>
+          </a:p>
+        </p:txBody>
+      </p:sp>
+      <p:sp>
+        <p:nvSpPr>
+          <p:cNvPr id="10" name="Text 8"/>
+          <p:cNvSpPr txBox="1"/>
+          <p:nvPr/>
+        </p:nvSpPr>
+        <p:spPr>
+          <a:xfrm>
+            <a:off x="2331720" y="2569464"/>
+            <a:ext cx="4892040" cy="868680"/>
+          </a:xfrm>
+          <a:prstGeom prst="rect">
+            <a:avLst/>
+          </a:prstGeom>
+          <a:noFill/>
+          <a:ln/>
+        </p:spPr>
+        <p:txBody>
+          <a:bodyPr wrap="square" lIns="0" tIns="0" rIns="0" bIns="0" rtlCol="0" anchor="ctr"/>
+          <a:lstStyle/>
+          <a:p>
+            <a:pPr marL="0" indent="0">
+              <a:lnSpc>
+                <a:spcPts val="1600"/>
+              </a:lnSpc>
+              <a:buNone/>
+            </a:pPr>
+            <a:r>
+              <a:rPr lang="en-US" sz="1250" dirty="0">
+                <a:solidFill>
+                  <a:srgbClr val="5F6478"/>
+                </a:solidFill>
+                <a:latin typeface="Calibri" pitchFamily="34" charset="0"/>
+                <a:ea typeface="Calibri" pitchFamily="34" charset="-122"/>
+                <a:cs typeface="Calibri" pitchFamily="34" charset="-120"/>
+              </a:rPr>
+              <a:t>Ovid compares the softening to beeswax from Mount Hymettus worked under the thumb — an image of material becoming pliable through handling.</a:t>
+            </a:r>
+            <a:endParaRPr lang="en-US" sz="1250" dirty="0"/>
+          </a:p>
+        </p:txBody>
+      </p:sp>
+      <p:sp>
+        <p:nvSpPr>
+          <p:cNvPr id="11" name="Shape 9"/>
+          <p:cNvSpPr/>
+          <p:nvPr/>
+        </p:nvSpPr>
+        <p:spPr>
+          <a:xfrm>
+            <a:off x="640080" y="3538728"/>
+            <a:ext cx="6766560" cy="868680"/>
+          </a:xfrm>
+          <a:prstGeom prst="roundRect">
+            <a:avLst>
+              <a:gd name="adj" fmla="val 8421"/>
+            </a:avLst>
+          </a:prstGeom>
+          <a:solidFill>
+            <a:srgbClr val="F6F2E9"/>
+          </a:solidFill>
+          <a:ln w="12700">
+            <a:solidFill>
+              <a:srgbClr val="F6F2E9"/>
+            </a:solidFill>
+            <a:prstDash val="solid"/>
+          </a:ln>
+        </p:spPr>
+        <p:txBody>
+          <a:bodyPr/>
+          <a:lstStyle/>
+          <a:p>
+            <a:endParaRPr lang="en-US"/>
+          </a:p>
+        </p:txBody>
+      </p:sp>
+      <p:sp>
+        <p:nvSpPr>
+          <p:cNvPr id="12" name="Text 10"/>
+          <p:cNvSpPr txBox="1"/>
+          <p:nvPr/>
+        </p:nvSpPr>
+        <p:spPr>
+          <a:xfrm>
+            <a:off x="914400" y="3538728"/>
+            <a:ext cx="1371600" cy="868680"/>
+          </a:xfrm>
+          <a:prstGeom prst="rect">
+            <a:avLst/>
+          </a:prstGeom>
+          <a:noFill/>
+          <a:ln/>
+        </p:spPr>
+        <p:txBody>
+          <a:bodyPr wrap="square" lIns="0" tIns="0" rIns="0" bIns="0" rtlCol="0" anchor="ctr"/>
+          <a:lstStyle/>
+          <a:p>
+            <a:pPr marL="0" indent="0">
+              <a:buNone/>
+            </a:pPr>
+            <a:r>
+              <a:rPr lang="en-US" sz="1600" b="1" dirty="0">
+                <a:solidFill>
+                  <a:srgbClr val="16182B"/>
+                </a:solidFill>
+                <a:latin typeface="Cambria" pitchFamily="34" charset="0"/>
+                <a:ea typeface="Cambria" pitchFamily="34" charset="-122"/>
+                <a:cs typeface="Cambria" pitchFamily="34" charset="-120"/>
+              </a:rPr>
+              <a:t>Doubt</a:t>
+            </a:r>
+            <a:endParaRPr lang="en-US" sz="1600" dirty="0"/>
+          </a:p>
+        </p:txBody>
+      </p:sp>
+      <p:sp>
+        <p:nvSpPr>
+          <p:cNvPr id="13" name="Text 11"/>
+          <p:cNvSpPr txBox="1"/>
+          <p:nvPr/>
+        </p:nvSpPr>
+        <p:spPr>
+          <a:xfrm>
+            <a:off x="2331720" y="3538728"/>
+            <a:ext cx="4892040" cy="868680"/>
+          </a:xfrm>
+          <a:prstGeom prst="rect">
+            <a:avLst/>
+          </a:prstGeom>
+          <a:noFill/>
+          <a:ln/>
+        </p:spPr>
+        <p:txBody>
+          <a:bodyPr wrap="square" lIns="0" tIns="0" rIns="0" bIns="0" rtlCol="0" anchor="ctr"/>
+          <a:lstStyle/>
+          <a:p>
+            <a:pPr marL="0" indent="0">
+              <a:lnSpc>
+                <a:spcPts val="1600"/>
+              </a:lnSpc>
+              <a:buNone/>
+            </a:pPr>
+            <a:r>
+              <a:rPr lang="en-US" sz="1250" dirty="0">
+                <a:solidFill>
+                  <a:srgbClr val="5F6478"/>
+                </a:solidFill>
+                <a:latin typeface="Calibri" pitchFamily="34" charset="0"/>
+                <a:ea typeface="Calibri" pitchFamily="34" charset="-122"/>
+                <a:cs typeface="Calibri" pitchFamily="34" charset="-120"/>
+              </a:rPr>
+              <a:t>He tests it again, and again. The text dwells on his disbelief far longer than on his joy: he is afraid he is mistaken.</a:t>
+            </a:r>
+            <a:endParaRPr lang="en-US" sz="1250" dirty="0"/>
+          </a:p>
+        </p:txBody>
+      </p:sp>
+      <p:sp>
+        <p:nvSpPr>
+          <p:cNvPr id="14" name="Shape 12"/>
+          <p:cNvSpPr/>
+          <p:nvPr/>
+        </p:nvSpPr>
+        <p:spPr>
+          <a:xfrm>
+            <a:off x="640080" y="4507992"/>
+            <a:ext cx="6766560" cy="868680"/>
+          </a:xfrm>
+          <a:prstGeom prst="roundRect">
+            <a:avLst>
+              <a:gd name="adj" fmla="val 8421"/>
+            </a:avLst>
+          </a:prstGeom>
+          <a:solidFill>
+            <a:srgbClr val="E7F0F2"/>
+          </a:solidFill>
+          <a:ln w="12700">
+            <a:solidFill>
+              <a:srgbClr val="E7F0F2"/>
+            </a:solidFill>
+            <a:prstDash val="solid"/>
+          </a:ln>
+        </p:spPr>
+        <p:txBody>
+          <a:bodyPr/>
+          <a:lstStyle/>
+          <a:p>
+            <a:endParaRPr lang="en-US"/>
+          </a:p>
+        </p:txBody>
+      </p:sp>
+      <p:sp>
+        <p:nvSpPr>
+          <p:cNvPr id="15" name="Text 13"/>
+          <p:cNvSpPr txBox="1"/>
+          <p:nvPr/>
+        </p:nvSpPr>
+        <p:spPr>
+          <a:xfrm>
+            <a:off x="914400" y="4507992"/>
+            <a:ext cx="1371600" cy="868680"/>
+          </a:xfrm>
+          <a:prstGeom prst="rect">
+            <a:avLst/>
+          </a:prstGeom>
+          <a:noFill/>
+          <a:ln/>
+        </p:spPr>
+        <p:txBody>
+          <a:bodyPr wrap="square" lIns="0" tIns="0" rIns="0" bIns="0" rtlCol="0" anchor="ctr"/>
+          <a:lstStyle/>
+          <a:p>
+            <a:pPr marL="0" indent="0">
+              <a:buNone/>
+            </a:pPr>
+            <a:r>
+              <a:rPr lang="en-US" sz="1600" b="1" dirty="0">
+                <a:solidFill>
+                  <a:srgbClr val="2E7D8C"/>
+                </a:solidFill>
+                <a:latin typeface="Cambria" pitchFamily="34" charset="0"/>
+                <a:ea typeface="Cambria" pitchFamily="34" charset="-122"/>
+                <a:cs typeface="Cambria" pitchFamily="34" charset="-120"/>
+              </a:rPr>
+              <a:t>The pulse</a:t>
+            </a:r>
+            <a:endParaRPr lang="en-US" sz="1600" dirty="0"/>
+          </a:p>
+        </p:txBody>
+      </p:sp>
+      <p:sp>
+        <p:nvSpPr>
+          <p:cNvPr id="16" name="Text 14"/>
+          <p:cNvSpPr txBox="1"/>
+          <p:nvPr/>
+        </p:nvSpPr>
+        <p:spPr>
+          <a:xfrm>
+            <a:off x="2331720" y="4507992"/>
+            <a:ext cx="4892040" cy="868680"/>
+          </a:xfrm>
+          <a:prstGeom prst="rect">
+            <a:avLst/>
+          </a:prstGeom>
+          <a:noFill/>
+          <a:ln/>
+        </p:spPr>
+        <p:txBody>
+          <a:bodyPr wrap="square" lIns="0" tIns="0" rIns="0" bIns="0" rtlCol="0" anchor="ctr"/>
+          <a:lstStyle/>
+          <a:p>
+            <a:pPr marL="0" indent="0">
+              <a:lnSpc>
+                <a:spcPts val="1600"/>
+              </a:lnSpc>
+              <a:buNone/>
+            </a:pPr>
+            <a:r>
+              <a:rPr lang="en-US" sz="1250" dirty="0">
+                <a:solidFill>
+                  <a:srgbClr val="5F6478"/>
+                </a:solidFill>
+                <a:latin typeface="Calibri" pitchFamily="34" charset="0"/>
+                <a:ea typeface="Calibri" pitchFamily="34" charset="-122"/>
+                <a:cs typeface="Calibri" pitchFamily="34" charset="-120"/>
+              </a:rPr>
+              <a:t>Veins beat under his thumb. Only then does he thank Venus — and the poem is careful to say she is the one who brought the marriage about.</a:t>
+            </a:r>
+            <a:endParaRPr lang="en-US" sz="1250" dirty="0"/>
+          </a:p>
+        </p:txBody>
+      </p:sp>
+      <p:sp>
+        <p:nvSpPr>
+          <p:cNvPr id="17" name="Shape 15"/>
+          <p:cNvSpPr/>
+          <p:nvPr/>
+        </p:nvSpPr>
+        <p:spPr>
+          <a:xfrm>
+            <a:off x="7680960" y="1600200"/>
+            <a:ext cx="3840480" cy="3831336"/>
+          </a:xfrm>
+          <a:prstGeom prst="roundRect">
+            <a:avLst>
+              <a:gd name="adj" fmla="val 1909"/>
+            </a:avLst>
+          </a:prstGeom>
+          <a:solidFill>
+            <a:srgbClr val="16182B"/>
+          </a:solidFill>
+          <a:ln w="12700">
+            <a:solidFill>
+              <a:srgbClr val="16182B"/>
+            </a:solidFill>
+            <a:prstDash val="solid"/>
+          </a:ln>
+        </p:spPr>
+        <p:txBody>
+          <a:bodyPr/>
+          <a:lstStyle/>
+          <a:p>
+            <a:endParaRPr lang="en-US"/>
+          </a:p>
+        </p:txBody>
+      </p:sp>
+      <p:sp>
+        <p:nvSpPr>
+          <p:cNvPr id="18" name="Text 16"/>
+          <p:cNvSpPr txBox="1"/>
+          <p:nvPr/>
+        </p:nvSpPr>
+        <p:spPr>
+          <a:xfrm>
+            <a:off x="8001000" y="1828800"/>
+            <a:ext cx="3291840" cy="292608"/>
+          </a:xfrm>
+          <a:prstGeom prst="rect">
+            <a:avLst/>
+          </a:prstGeom>
+          <a:noFill/>
+          <a:ln/>
+        </p:spPr>
+        <p:txBody>
+          <a:bodyPr wrap="square" lIns="0" tIns="0" rIns="0" bIns="0" rtlCol="0" anchor="ctr"/>
+          <a:lstStyle/>
+          <a:p>
+            <a:pPr marL="0" indent="0">
+              <a:buNone/>
+            </a:pPr>
+            <a:r>
+              <a:rPr lang="en-US" sz="1100" b="1" kern="0" spc="140" dirty="0">
+                <a:solidFill>
+                  <a:srgbClr val="C9A227"/>
+                </a:solidFill>
+                <a:latin typeface="Calibri" pitchFamily="34" charset="0"/>
+                <a:ea typeface="Calibri" pitchFamily="34" charset="-122"/>
+                <a:cs typeface="Calibri" pitchFamily="34" charset="-120"/>
+              </a:rPr>
+              <a:t>The load-bearing point</a:t>
+            </a:r>
+            <a:endParaRPr lang="en-US" sz="1100" dirty="0"/>
+          </a:p>
+        </p:txBody>
+      </p:sp>
+      <p:sp>
+        <p:nvSpPr>
+          <p:cNvPr id="19" name="Text 17"/>
+          <p:cNvSpPr txBox="1"/>
+          <p:nvPr/>
+        </p:nvSpPr>
+        <p:spPr>
+          <a:xfrm>
+            <a:off x="8001000" y="2194560"/>
+            <a:ext cx="3246120" cy="3017520"/>
+          </a:xfrm>
+          <a:prstGeom prst="rect">
+            <a:avLst/>
+          </a:prstGeom>
+          <a:noFill/>
+          <a:ln/>
+        </p:spPr>
+        <p:txBody>
+          <a:bodyPr wrap="square" lIns="0" tIns="0" rIns="0" bIns="0" rtlCol="0" anchor="ctr"/>
+          <a:lstStyle/>
+          <a:p>
+            <a:pPr marL="0" indent="0">
+              <a:lnSpc>
+                <a:spcPts val="2100"/>
+              </a:lnSpc>
+              <a:buNone/>
+            </a:pPr>
+            <a:r>
+              <a:rPr lang="en-US" sz="1450" dirty="0">
+                <a:solidFill>
+                  <a:srgbClr val="EDE6D6"/>
+                </a:solidFill>
+                <a:latin typeface="Cambria" pitchFamily="34" charset="0"/>
+                <a:ea typeface="Cambria" pitchFamily="34" charset="-122"/>
+                <a:cs typeface="Cambria" pitchFamily="34" charset="-120"/>
+              </a:rPr>
+              <a:t>Pygmalion does not bring her to life.</a:t>
+            </a:r>
+            <a:endParaRPr lang="en-US" sz="1450" dirty="0"/>
+          </a:p>
+          <a:p>
+            <a:pPr marL="0" indent="0">
+              <a:lnSpc>
+                <a:spcPts val="2100"/>
+              </a:lnSpc>
+              <a:buNone/>
+            </a:pPr>
+            <a:endParaRPr lang="en-US" sz="1450" dirty="0"/>
+          </a:p>
+          <a:p>
+            <a:pPr marL="0" indent="0">
+              <a:lnSpc>
+                <a:spcPts val="2100"/>
+              </a:lnSpc>
+              <a:buNone/>
+            </a:pPr>
+            <a:r>
+              <a:rPr lang="en-US" sz="1450" dirty="0">
+                <a:solidFill>
+                  <a:srgbClr val="EDE6D6"/>
+                </a:solidFill>
+                <a:latin typeface="Cambria" pitchFamily="34" charset="0"/>
+                <a:ea typeface="Cambria" pitchFamily="34" charset="-122"/>
+                <a:cs typeface="Cambria" pitchFamily="34" charset="-120"/>
+              </a:rPr>
+              <a:t>His competence ends at the likeness. The life is granted by a goddess, off-page, in response to a wish he would not say.</a:t>
+            </a:r>
+            <a:endParaRPr lang="en-US" sz="1450" dirty="0"/>
+          </a:p>
+          <a:p>
+            <a:pPr marL="0" indent="0">
+              <a:lnSpc>
+                <a:spcPts val="2100"/>
+              </a:lnSpc>
+              <a:buNone/>
+            </a:pPr>
+            <a:endParaRPr lang="en-US" sz="1450" dirty="0"/>
+          </a:p>
+          <a:p>
+            <a:pPr marL="0" indent="0">
+              <a:lnSpc>
+                <a:spcPts val="2100"/>
+              </a:lnSpc>
+              <a:buNone/>
+            </a:pPr>
+            <a:r>
+              <a:rPr lang="en-US" sz="1450" dirty="0">
+                <a:solidFill>
+                  <a:srgbClr val="EDE6D6"/>
+                </a:solidFill>
+                <a:latin typeface="Cambria" pitchFamily="34" charset="0"/>
+                <a:ea typeface="Cambria" pitchFamily="34" charset="-122"/>
+                <a:cs typeface="Cambria" pitchFamily="34" charset="-120"/>
+              </a:rPr>
+              <a:t>In our stories, what plays the part of Venus? Scale. Emergence. Data. A threshold crossed. Ask what each of those words lets a maker avoid claiming.</a:t>
+            </a:r>
+            <a:endParaRPr lang="en-US" sz="1450" dirty="0"/>
+          </a:p>
+        </p:txBody>
+      </p:sp>
+      <p:sp>
+        <p:nvSpPr>
+          <p:cNvPr id="20" name="Text 18"/>
+          <p:cNvSpPr txBox="1"/>
+          <p:nvPr/>
+        </p:nvSpPr>
+        <p:spPr>
+          <a:xfrm>
+            <a:off x="640080" y="6272784"/>
+            <a:ext cx="10911535" cy="274320"/>
+          </a:xfrm>
+          <a:prstGeom prst="rect">
+            <a:avLst/>
+          </a:prstGeom>
+          <a:noFill/>
+          <a:ln/>
+        </p:spPr>
+        <p:txBody>
+          <a:bodyPr wrap="square" lIns="0" tIns="0" rIns="0" bIns="0" rtlCol="0" anchor="ctr"/>
+          <a:lstStyle/>
+          <a:p>
+            <a:pPr marL="0" indent="0">
+              <a:buNone/>
+            </a:pPr>
+            <a:r>
+              <a:rPr lang="en-US" sz="1000" i="1" dirty="0">
+                <a:solidFill>
+                  <a:srgbClr val="5F6478"/>
+                </a:solidFill>
+                <a:latin typeface="Calibri" pitchFamily="34" charset="0"/>
+                <a:ea typeface="Calibri" pitchFamily="34" charset="-122"/>
+                <a:cs typeface="Calibri" pitchFamily="34" charset="-120"/>
+              </a:rPr>
+              <a:t>Ovid, Metamorphoses Bk X:280–294 (trans. Kline).</a:t>
             </a:r>
             <a:endParaRPr lang="en-US" sz="1000" dirty="0"/>
           </a:p>

--- a/courses/COLL150-Fall26/Slides/Unit 1 - Pygmalion & Narcissus.pptx
+++ b/courses/COLL150-Fall26/Slides/Unit 1 - Pygmalion & Narcissus.pptx
@@ -142,7 +142,7 @@
   <pc:docChgLst>
     <pc:chgData name="Ashley Y. Gao" userId="f07f2add99568f29" providerId="LiveId" clId="{D3788EF0-A3FF-42A8-A4D2-3038F3EB0EE4}"/>
     <pc:docChg chg="undo custSel delSld modSld">
-      <pc:chgData name="Ashley Y. Gao" userId="f07f2add99568f29" providerId="LiveId" clId="{D3788EF0-A3FF-42A8-A4D2-3038F3EB0EE4}" dt="2026-09-01T13:47:38.123" v="3" actId="47"/>
+      <pc:chgData name="Ashley Y. Gao" userId="f07f2add99568f29" providerId="LiveId" clId="{D3788EF0-A3FF-42A8-A4D2-3038F3EB0EE4}" dt="2026-09-01T17:43:12.665" v="47" actId="20577"/>
       <pc:docMkLst>
         <pc:docMk/>
       </pc:docMkLst>
@@ -165,6 +165,126 @@
             <pc:docMk/>
             <pc:sldMk cId="0" sldId="260"/>
             <ac:spMk id="5" creationId="{00000000-0000-0000-0000-000000000000}"/>
+          </ac:spMkLst>
+        </pc:spChg>
+      </pc:sldChg>
+      <pc:sldChg chg="modSp mod">
+        <pc:chgData name="Ashley Y. Gao" userId="f07f2add99568f29" providerId="LiveId" clId="{D3788EF0-A3FF-42A8-A4D2-3038F3EB0EE4}" dt="2026-09-01T17:43:12.665" v="47" actId="20577"/>
+        <pc:sldMkLst>
+          <pc:docMk/>
+          <pc:sldMk cId="0" sldId="262"/>
+        </pc:sldMkLst>
+        <pc:spChg chg="mod">
+          <ac:chgData name="Ashley Y. Gao" userId="f07f2add99568f29" providerId="LiveId" clId="{D3788EF0-A3FF-42A8-A4D2-3038F3EB0EE4}" dt="2026-09-01T17:43:12.665" v="47" actId="20577"/>
+          <ac:spMkLst>
+            <pc:docMk/>
+            <pc:sldMk cId="0" sldId="262"/>
+            <ac:spMk id="12" creationId="{00000000-0000-0000-0000-000000000000}"/>
+          </ac:spMkLst>
+        </pc:spChg>
+      </pc:sldChg>
+      <pc:sldChg chg="modSp mod">
+        <pc:chgData name="Ashley Y. Gao" userId="f07f2add99568f29" providerId="LiveId" clId="{D3788EF0-A3FF-42A8-A4D2-3038F3EB0EE4}" dt="2026-09-01T17:36:24.034" v="10" actId="20577"/>
+        <pc:sldMkLst>
+          <pc:docMk/>
+          <pc:sldMk cId="0" sldId="265"/>
+        </pc:sldMkLst>
+        <pc:spChg chg="mod">
+          <ac:chgData name="Ashley Y. Gao" userId="f07f2add99568f29" providerId="LiveId" clId="{D3788EF0-A3FF-42A8-A4D2-3038F3EB0EE4}" dt="2026-09-01T17:36:24.034" v="10" actId="20577"/>
+          <ac:spMkLst>
+            <pc:docMk/>
+            <pc:sldMk cId="0" sldId="265"/>
+            <ac:spMk id="12" creationId="{00000000-0000-0000-0000-000000000000}"/>
+          </ac:spMkLst>
+        </pc:spChg>
+      </pc:sldChg>
+      <pc:sldChg chg="modSp mod">
+        <pc:chgData name="Ashley Y. Gao" userId="f07f2add99568f29" providerId="LiveId" clId="{D3788EF0-A3FF-42A8-A4D2-3038F3EB0EE4}" dt="2026-09-01T17:37:25.239" v="17" actId="20577"/>
+        <pc:sldMkLst>
+          <pc:docMk/>
+          <pc:sldMk cId="0" sldId="267"/>
+        </pc:sldMkLst>
+        <pc:spChg chg="mod">
+          <ac:chgData name="Ashley Y. Gao" userId="f07f2add99568f29" providerId="LiveId" clId="{D3788EF0-A3FF-42A8-A4D2-3038F3EB0EE4}" dt="2026-09-01T17:37:25.239" v="17" actId="20577"/>
+          <ac:spMkLst>
+            <pc:docMk/>
+            <pc:sldMk cId="0" sldId="267"/>
+            <ac:spMk id="16" creationId="{00000000-0000-0000-0000-000000000000}"/>
+          </ac:spMkLst>
+        </pc:spChg>
+      </pc:sldChg>
+      <pc:sldChg chg="modSp mod">
+        <pc:chgData name="Ashley Y. Gao" userId="f07f2add99568f29" providerId="LiveId" clId="{D3788EF0-A3FF-42A8-A4D2-3038F3EB0EE4}" dt="2026-09-01T17:38:21.668" v="22" actId="20577"/>
+        <pc:sldMkLst>
+          <pc:docMk/>
+          <pc:sldMk cId="0" sldId="269"/>
+        </pc:sldMkLst>
+        <pc:spChg chg="mod">
+          <ac:chgData name="Ashley Y. Gao" userId="f07f2add99568f29" providerId="LiveId" clId="{D3788EF0-A3FF-42A8-A4D2-3038F3EB0EE4}" dt="2026-09-01T17:38:21.668" v="22" actId="20577"/>
+          <ac:spMkLst>
+            <pc:docMk/>
+            <pc:sldMk cId="0" sldId="269"/>
+            <ac:spMk id="41" creationId="{00000000-0000-0000-0000-000000000000}"/>
+          </ac:spMkLst>
+        </pc:spChg>
+      </pc:sldChg>
+      <pc:sldChg chg="modSp mod">
+        <pc:chgData name="Ashley Y. Gao" userId="f07f2add99568f29" providerId="LiveId" clId="{D3788EF0-A3FF-42A8-A4D2-3038F3EB0EE4}" dt="2026-09-01T17:38:44.024" v="28" actId="20577"/>
+        <pc:sldMkLst>
+          <pc:docMk/>
+          <pc:sldMk cId="0" sldId="270"/>
+        </pc:sldMkLst>
+        <pc:spChg chg="mod">
+          <ac:chgData name="Ashley Y. Gao" userId="f07f2add99568f29" providerId="LiveId" clId="{D3788EF0-A3FF-42A8-A4D2-3038F3EB0EE4}" dt="2026-09-01T17:38:44.024" v="28" actId="20577"/>
+          <ac:spMkLst>
+            <pc:docMk/>
+            <pc:sldMk cId="0" sldId="270"/>
+            <ac:spMk id="16" creationId="{00000000-0000-0000-0000-000000000000}"/>
+          </ac:spMkLst>
+        </pc:spChg>
+      </pc:sldChg>
+      <pc:sldChg chg="modSp mod">
+        <pc:chgData name="Ashley Y. Gao" userId="f07f2add99568f29" providerId="LiveId" clId="{D3788EF0-A3FF-42A8-A4D2-3038F3EB0EE4}" dt="2026-09-01T17:42:56.163" v="39" actId="20577"/>
+        <pc:sldMkLst>
+          <pc:docMk/>
+          <pc:sldMk cId="0" sldId="277"/>
+        </pc:sldMkLst>
+        <pc:spChg chg="mod">
+          <ac:chgData name="Ashley Y. Gao" userId="f07f2add99568f29" providerId="LiveId" clId="{D3788EF0-A3FF-42A8-A4D2-3038F3EB0EE4}" dt="2026-09-01T17:42:56.163" v="39" actId="20577"/>
+          <ac:spMkLst>
+            <pc:docMk/>
+            <pc:sldMk cId="0" sldId="277"/>
+            <ac:spMk id="13" creationId="{00000000-0000-0000-0000-000000000000}"/>
+          </ac:spMkLst>
+        </pc:spChg>
+      </pc:sldChg>
+      <pc:sldChg chg="modSp mod">
+        <pc:chgData name="Ashley Y. Gao" userId="f07f2add99568f29" providerId="LiveId" clId="{D3788EF0-A3FF-42A8-A4D2-3038F3EB0EE4}" dt="2026-09-01T17:42:26.436" v="30" actId="20577"/>
+        <pc:sldMkLst>
+          <pc:docMk/>
+          <pc:sldMk cId="0" sldId="281"/>
+        </pc:sldMkLst>
+        <pc:spChg chg="mod">
+          <ac:chgData name="Ashley Y. Gao" userId="f07f2add99568f29" providerId="LiveId" clId="{D3788EF0-A3FF-42A8-A4D2-3038F3EB0EE4}" dt="2026-09-01T17:42:26.436" v="30" actId="20577"/>
+          <ac:spMkLst>
+            <pc:docMk/>
+            <pc:sldMk cId="0" sldId="281"/>
+            <ac:spMk id="3" creationId="{00000000-0000-0000-0000-000000000000}"/>
+          </ac:spMkLst>
+        </pc:spChg>
+      </pc:sldChg>
+      <pc:sldChg chg="modSp mod">
+        <pc:chgData name="Ashley Y. Gao" userId="f07f2add99568f29" providerId="LiveId" clId="{D3788EF0-A3FF-42A8-A4D2-3038F3EB0EE4}" dt="2026-09-01T17:42:42.767" v="34" actId="20577"/>
+        <pc:sldMkLst>
+          <pc:docMk/>
+          <pc:sldMk cId="0" sldId="283"/>
+        </pc:sldMkLst>
+        <pc:spChg chg="mod">
+          <ac:chgData name="Ashley Y. Gao" userId="f07f2add99568f29" providerId="LiveId" clId="{D3788EF0-A3FF-42A8-A4D2-3038F3EB0EE4}" dt="2026-09-01T17:42:42.767" v="34" actId="20577"/>
+          <ac:spMkLst>
+            <pc:docMk/>
+            <pc:sldMk cId="0" sldId="283"/>
+            <ac:spMk id="10" creationId="{00000000-0000-0000-0000-000000000000}"/>
           </ac:spMkLst>
         </pc:spChg>
       </pc:sldChg>
@@ -3802,7 +3922,7 @@
                 <a:ea typeface="Calibri" pitchFamily="34" charset="-122"/>
                 <a:cs typeface="Calibri" pitchFamily="34" charset="-120"/>
               </a:rPr>
-              <a:t>Ask the room to list contemporary narratives that stop in the same place, and the much smaller number that keep going. The ones that keep going are almost always the ones where the made thing acquires a voice and uses it against its maker.</a:t>
+              <a:t>Can we list contemporary narratives that stop in the same place, and the much smaller number that keep going. The ones that keep going are almost always the ones where the made thing acquires a voice and uses it against its maker.</a:t>
             </a:r>
             <a:endParaRPr lang="en-US" sz="1350" dirty="0"/>
           </a:p>
@@ -6305,7 +6425,7 @@
                 <a:ea typeface="Cambria" pitchFamily="34" charset="-122"/>
                 <a:cs typeface="Cambria" pitchFamily="34" charset="-120"/>
               </a:rPr>
-              <a:t>Test to apply: does the made thing get to speak for itself, and does the poem let its speech change the outcome?</a:t>
+              <a:t>Does the made thing get to speak for itself, and does the poem let its speech change the outcome?</a:t>
             </a:r>
             <a:endParaRPr lang="en-US" sz="1500" dirty="0"/>
           </a:p>
@@ -6869,7 +6989,7 @@
                 <a:ea typeface="Cambria" pitchFamily="34" charset="-122"/>
                 <a:cs typeface="Cambria" pitchFamily="34" charset="-120"/>
               </a:rPr>
-              <a:t>You are writing the sequel from her point of view. What is the first thing she says, and to whom?</a:t>
+              <a:t>If you are writing the sequel from her point of view. What is the first thing she says, and to whom?</a:t>
             </a:r>
             <a:endParaRPr lang="en-US" sz="1600" dirty="0"/>
           </a:p>
@@ -11927,7 +12047,7 @@
                 <a:ea typeface="Calibri" pitchFamily="34" charset="-122"/>
                 <a:cs typeface="Calibri" pitchFamily="34" charset="-120"/>
               </a:rPr>
-              <a:t>Narcissus is the strongest available argument against the assumption that disclosure solves the problem. He is told by the narrator, and then tells himself, exactly what he is looking at. Ask the room what this predicts about a label on a chatbot that says it is not a person — and what, if anything, would work better.</a:t>
+              <a:t>Narcissus is the strongest available argument against the assumption that disclosure solves the problem. He is told by the narrator, and then tells himself, exactly what he is looking at. What this predicts about a label on a chatbot that says it is not a person — and what, if anything, would work better.</a:t>
             </a:r>
             <a:endParaRPr lang="en-US" sz="1350" dirty="0"/>
           </a:p>
@@ -14246,7 +14366,7 @@
                 <a:ea typeface="Calibri" pitchFamily="34" charset="-122"/>
                 <a:cs typeface="Calibri" pitchFamily="34" charset="-120"/>
               </a:rPr>
-              <a:t>GROUP WORK · FOUR GROUPS · NINE MINUTES, THEN REPORT</a:t>
+              <a:t>GROUP WORK </a:t>
             </a:r>
             <a:endParaRPr lang="en-US" sz="1100" dirty="0"/>
           </a:p>
@@ -16204,7 +16324,7 @@
                 <a:ea typeface="Calibri" pitchFamily="34" charset="-122"/>
                 <a:cs typeface="Calibri" pitchFamily="34" charset="-120"/>
               </a:rPr>
-              <a:t>SUGGESTED READING FOR NEXT SESSION — ADJUST TO YOUR SYLLABUS</a:t>
+              <a:t>SUGGESTED READING FOR NEXT SESSION</a:t>
             </a:r>
             <a:endParaRPr lang="en-US" sz="1100" dirty="0"/>
           </a:p>
@@ -17848,7 +17968,7 @@
               <a:buNone/>
             </a:pPr>
             <a:r>
-              <a:rPr lang="en-US" sz="1100" b="1" kern="0" spc="140" dirty="0">
+              <a:rPr lang="en-US" sz="1100" b="1" kern="0" spc="140">
                 <a:solidFill>
                   <a:srgbClr val="C9A227"/>
                 </a:solidFill>
@@ -17856,7 +17976,7 @@
                 <a:ea typeface="Calibri" pitchFamily="34" charset="-122"/>
                 <a:cs typeface="Calibri" pitchFamily="34" charset="-120"/>
               </a:rPr>
-              <a:t>Ask the room</a:t>
+              <a:t>Question</a:t>
             </a:r>
             <a:endParaRPr lang="en-US" sz="1100" dirty="0"/>
           </a:p>
@@ -20131,7 +20251,7 @@
                 <a:ea typeface="Calibri" pitchFamily="34" charset="-122"/>
                 <a:cs typeface="Calibri" pitchFamily="34" charset="-120"/>
               </a:rPr>
-              <a:t>He gets what he wants only because the system he is petitioning infers the request behind the request. Ask the room what is gained and what is lost when a thing is built to satisfy the wish rather than the words — and who is accountable for a wish that was never said out loud.</a:t>
+              <a:t>He gets what he wants only because the system he is petitioning infers the request behind the request. What is gained and what is lost when a thing is built to satisfy the wish rather than the words — and who is accountable for a wish that was never said out loud?</a:t>
             </a:r>
             <a:endParaRPr lang="en-US" sz="1250" dirty="0"/>
           </a:p>
